--- a/docs/교재/실전반/06일차/실전반_06일차.pptx
+++ b/docs/교재/실전반/06일차/실전반_06일차.pptx
@@ -3157,7 +3157,7 @@
           <a:lstStyle/>
           <a:p>
             <a:r>
-              <a:t>이 실습에서는 bpmn.io로 작은 승인 절차를 직접 그립니다. 정비 요청으로 시작해 담당자가 확인하고, 승인 여부에 따라 승인 종료와 반려 종료로 갈립니다. 게이트웨이의 두 갈래가 빠짐없이 끝 이벤트에 닿는지를 확인합니다. 끝나면 BPMN 파일 하나가 만들어집니다.</a:t>
+              <a:t>이 실습에서는 bpmn.io로 작은 승인 절차를 직접 그립니다. 정비 요청으로 시작해 담당자가 확인하고, 승인 여부에 따라 승인 종료와 거절 종결로 갈립니다. 게이트웨이의 두 갈래가 빠짐없이 끝 이벤트에 닿는지를 확인합니다. 끝나면 BPMN 파일 하나가 만들어집니다.</a:t>
             </a:r>
           </a:p>
         </p:txBody>
@@ -3507,7 +3507,7 @@
           <a:lstStyle/>
           <a:p>
             <a:r>
-              <a:t>마지막 실습에서는 배포한 프로세스를 실제로 실행합니다. 쿨러 열화를 일으켜 처리 건이 열리는 것을 보고, 에이전트의 판단 뒤 운전원 승인에서 기다리는 상태를 확인합니다. 승인한 뒤에는 명령과 유온 재확인을 거쳐 어느 끝 이벤트에 닿았는지를 읽습니다. 승인을 기다리는 상태와 끝난 상태를 처리 건의 기록으로 구분해 보시기 바랍니다.</a:t>
+              <a:t>마지막 실습에서는 배포한 프로세스를 실제로 실행합니다. 쿨러 열화를 일으켜 처리 건이 열리는 것을 보고, 에이전트의 판단 뒤 운전원 승인에서 기다리는 상태를 확인합니다. 승인한 뒤에는 명령과 재관측을 거쳐 어느 끝 이벤트에 닿았는지를 읽습니다. 승인을 기다리는 상태와 끝난 상태를 처리 건의 기록으로 구분해 보시기 바랍니다.</a:t>
             </a:r>
           </a:p>
         </p:txBody>
@@ -12597,7 +12597,7 @@
       </p:sp>
       <p:pic>
         <p:nvPicPr>
-          <p:cNvPr id="6" name="삽화:BPM주기.svg" descr="illust_3518643921005923685_1791735769.png"/>
+          <p:cNvPr id="6" name="삽화:BPM주기.svg" descr="illust_8837986289016217279_1791735769.png"/>
           <p:cNvPicPr>
             <a:picLocks noChangeAspect="1"/>
           </p:cNvPicPr>
@@ -14168,7 +14168,7 @@
       </p:sp>
       <p:pic>
         <p:nvPicPr>
-          <p:cNvPr id="6" name="삽화:현재와목표.svg" descr="illust_7899549954757651941_1791735769.png"/>
+          <p:cNvPr id="6" name="삽화:현재와목표.svg" descr="illust_8683122926200665815_1791735769.png"/>
           <p:cNvPicPr>
             <a:picLocks noChangeAspect="1"/>
           </p:cNvPicPr>
@@ -18097,7 +18097,7 @@
       </p:sp>
       <p:pic>
         <p:nvPicPr>
-          <p:cNvPr id="6" name="삽화:요소묶음.svg" descr="illust_1753654790690200494_1791735769.png"/>
+          <p:cNvPr id="6" name="삽화:요소묶음.svg" descr="illust_3252944488496614248_1791735769.png"/>
           <p:cNvPicPr>
             <a:picLocks noChangeAspect="1"/>
           </p:cNvPicPr>
@@ -18734,7 +18734,7 @@
       </p:sp>
       <p:pic>
         <p:nvPicPr>
-          <p:cNvPr id="6" name="삽화:흐름_전체.svg" descr="illust_2261683496821648921_1791735769.png"/>
+          <p:cNvPr id="6" name="삽화:흐름_전체.svg" descr="illust_8364352883464941294_1791735769.png"/>
           <p:cNvPicPr>
             <a:picLocks noChangeAspect="1"/>
           </p:cNvPicPr>
@@ -19602,7 +19602,7 @@
       </p:sp>
       <p:pic>
         <p:nvPicPr>
-          <p:cNvPr id="6" name="삽화:이벤트.svg" descr="illust_2492863151624832359_1791735769.png"/>
+          <p:cNvPr id="6" name="삽화:이벤트.svg" descr="illust_5474284620074334751_1791735769.png"/>
           <p:cNvPicPr>
             <a:picLocks noChangeAspect="1"/>
           </p:cNvPicPr>
@@ -20092,7 +20092,7 @@
       </p:sp>
       <p:pic>
         <p:nvPicPr>
-          <p:cNvPr id="6" name="삽화:작업종류.svg" descr="illust_6131696040320624554_1791735769.png"/>
+          <p:cNvPr id="6" name="삽화:작업종류.svg" descr="illust_4111669792733868039_1791735769.png"/>
           <p:cNvPicPr>
             <a:picLocks noChangeAspect="1"/>
           </p:cNvPicPr>
@@ -20750,7 +20750,7 @@
       </p:sp>
       <p:pic>
         <p:nvPicPr>
-          <p:cNvPr id="6" name="삽화:게이트웨이.svg" descr="illust_8645874859535633953_1791735769.png"/>
+          <p:cNvPr id="6" name="삽화:게이트웨이.svg" descr="illust_4664442136353941024_1791735769.png"/>
           <p:cNvPicPr>
             <a:picLocks noChangeAspect="1"/>
           </p:cNvPicPr>
@@ -22257,7 +22257,7 @@
       </p:sp>
       <p:pic>
         <p:nvPicPr>
-          <p:cNvPr id="6" name="삽화:풀과레인.svg" descr="illust_5551204862077164293_1791735769.png"/>
+          <p:cNvPr id="6" name="삽화:풀과레인.svg" descr="illust_4501005401438344438_1791735769.png"/>
           <p:cNvPicPr>
             <a:picLocks noChangeAspect="1"/>
           </p:cNvPicPr>
@@ -22873,7 +22873,7 @@
       </p:sp>
       <p:pic>
         <p:nvPicPr>
-          <p:cNvPr id="6" name="삽화:메시지흐름.svg" descr="illust_6289329756551404839_1791735769.png"/>
+          <p:cNvPr id="6" name="삽화:메시지흐름.svg" descr="illust_983156028435267317_1791735769.png"/>
           <p:cNvPicPr>
             <a:picLocks noChangeAspect="1"/>
           </p:cNvPicPr>
@@ -24103,7 +24103,7 @@
       </p:sp>
       <p:pic>
         <p:nvPicPr>
-          <p:cNvPr id="6" name="삽화:경계타이머.svg" descr="illust_955155005374445659_1791735769.png"/>
+          <p:cNvPr id="6" name="삽화:경계타이머.svg" descr="illust_7209098857802487913_1791735769.png"/>
           <p:cNvPicPr>
             <a:picLocks noChangeAspect="1"/>
           </p:cNvPicPr>
@@ -24593,7 +24593,7 @@
       </p:sp>
       <p:pic>
         <p:nvPicPr>
-          <p:cNvPr id="6" name="삽화:승인자리.svg" descr="illust_7067512555675215705_1791735769.png"/>
+          <p:cNvPr id="6" name="삽화:승인자리.svg" descr="illust_5158529698987013931_1791735769.png"/>
           <p:cNvPicPr>
             <a:picLocks noChangeAspect="1"/>
           </p:cNvPicPr>
@@ -28278,7 +28278,7 @@
       </p:sp>
       <p:pic>
         <p:nvPicPr>
-          <p:cNvPr id="6" name="삽화:정의와인스턴스.svg" descr="illust_5654391516846498146_1791735769.png"/>
+          <p:cNvPr id="6" name="삽화:정의와인스턴스.svg" descr="illust_7150401798273319049_1791735769.png"/>
           <p:cNvPicPr>
             <a:picLocks noChangeAspect="1"/>
           </p:cNvPicPr>
@@ -28789,7 +28789,7 @@
       </p:sp>
       <p:pic>
         <p:nvPicPr>
-          <p:cNvPr id="6" name="삽화:흐름_토큰_승인대기.svg" descr="illust_6795394616197450385_1791735769.png"/>
+          <p:cNvPr id="6" name="삽화:흐름_토큰_승인대기.svg" descr="illust_5249184503074932034_1791735769.png"/>
           <p:cNvPicPr>
             <a:picLocks noChangeAspect="1"/>
           </p:cNvPicPr>
@@ -30185,7 +30185,7 @@
       </p:sp>
       <p:pic>
         <p:nvPicPr>
-          <p:cNvPr id="6" name="삽화:흐름_토큰_둘.svg" descr="illust_4535922523900576876_1791735769.png"/>
+          <p:cNvPr id="6" name="삽화:흐름_토큰_둘.svg" descr="illust_6534488704381414822_1791735769.png"/>
           <p:cNvPicPr>
             <a:picLocks noChangeAspect="1"/>
           </p:cNvPicPr>
@@ -31686,7 +31686,7 @@
                 <a:ea typeface="맑은 고딕"/>
                 <a:cs typeface="맑은 고딕"/>
               </a:rPr>
-              <a:t>cause는 에이전트 단계가, chosen_skill은 운전원 승인이, work_order는 작업지시 등록이 만들었다.</a:t>
+              <a:t>cause는 에이전트 단계가, 승인된 조치 방법 chosen_skill은 운전원 승인이, work_order는 작업지시 등록이 만들었다.</a:t>
             </a:r>
           </a:p>
         </p:txBody>
@@ -39231,7 +39231,7 @@
       </p:sp>
       <p:pic>
         <p:nvPicPr>
-          <p:cNvPr id="6" name="삽화:남은일_추천뒤.svg" descr="illust_4369440213216718611_1791735769.png"/>
+          <p:cNvPr id="6" name="삽화:남은일_추천뒤.svg" descr="illust_711583469774950697_1791735769.png"/>
           <p:cNvPicPr>
             <a:picLocks noChangeAspect="1"/>
           </p:cNvPicPr>
@@ -39919,7 +39919,7 @@
                 <a:ea typeface="맑은 고딕"/>
                 <a:cs typeface="맑은 고딕"/>
               </a:rPr>
-              <a:t>이 실습을 마치면 정비 요청에서 승인 종료와 반려 종료까지를 그린 BPMN 파일 하나가 만들어진다.</a:t>
+              <a:t>이 실습을 마치면 정비 요청에서 승인 종료와 거절 종결까지를 그린 BPMN 파일 하나가 만들어진다.</a:t>
             </a:r>
           </a:p>
         </p:txBody>
@@ -40748,7 +40748,7 @@
                 <a:ea typeface="맑은 고딕"/>
                 <a:cs typeface="맑은 고딕"/>
               </a:rPr>
-              <a:t>반려 종료에</a:t>
+              <a:t>거절 종결에</a:t>
             </a:r>
           </a:p>
           <a:p>
@@ -47586,7 +47586,7 @@
                 <a:ea typeface="맑은 고딕"/>
                 <a:cs typeface="맑은 고딕"/>
               </a:rPr>
-              <a:t>승인 뒤 명령, 유온 재확인을 거쳐 닿은 끝 이벤트와 결과를 읽는다</a:t>
+              <a:t>승인 뒤 명령, 재관측을 거쳐 닿은 끝 이벤트와 결과를 읽는다</a:t>
             </a:r>
           </a:p>
         </p:txBody>
@@ -53550,7 +53550,7 @@
       </p:sp>
       <p:pic>
         <p:nvPicPr>
-          <p:cNvPr id="6" name="삽화:남은일_종단.svg" descr="illust_9168033459993528683_1791735769.png"/>
+          <p:cNvPr id="6" name="삽화:남은일_종단.svg" descr="illust_6208647358577896618_1791735769.png"/>
           <p:cNvPicPr>
             <a:picLocks noChangeAspect="1"/>
           </p:cNvPicPr>

--- a/docs/교재/실전반/06일차/실전반_06일차.pptx
+++ b/docs/교재/실전반/06일차/실전반_06일차.pptx
@@ -707,7 +707,7 @@
           <a:lstStyle/>
           <a:p>
             <a:r>
-              <a:t>앞에서 에이전트에게 맡길 수 없다고 한 것이 프로세스에서 어떻게 지켜지는지 확인합니다. 냉각 명령 작업은 승인 작업이 승인으로 끝나야 열리므로 추천만으로는 명령이 나가지 않습니다. 승인 작업은 운전원 역할만 끝낼 수 있고, 다른 역할의 시도는 거부되어 기록으로 남습니다. 이 모든 진행이 처리 건에 남아 나중에 되짚을 수 있습니다.</a:t>
+              <a:t>앞에서 에이전트에게 맡길 수 없다고 한 것이 프로세스에서 어떻게 지켜지는지 확인합니다. 냉각 명령 작업은 승인 작업이 승인으로 끝나야 열리므로 추천안만으로는 명령이 나가지 않습니다. 승인 작업은 운전원 역할만 끝낼 수 있고, 다른 역할의 시도는 거부되어 기록으로 남습니다. 이 모든 진행이 처리 건에 남아 나중에 되짚을 수 있습니다.</a:t>
             </a:r>
           </a:p>
         </p:txBody>
@@ -1337,7 +1337,7 @@
           <a:lstStyle/>
           <a:p>
             <a:r>
-              <a:t>에이전트가 원인을 쿨러 핀 오염으로 가리고 팬 최대 운전을 추천한 시점에서 시작하겠습니다. 추천은 나왔지만 팬은 아직 그대로 돌고 유온도 그대로입니다. 운전원의 승인, 설비로 가는 냉각 명령, 유온을 다시 읽는 재관측, 핀 세척을 위한 작업지시 등록, 결과 보고가 남아 있습니다.</a:t>
+              <a:t>에이전트가 원인을 쿨러 핀 오염으로 가리고 팬 최대 운전을 추천한 시점에서 시작하겠습니다. 에이전트가 낸 것, 곧 추천 하나와 대안과 그 이유를 묶은 것이 앞 일차에서 본 추천안입니다. 추천안은 나왔지만 팬은 아직 그대로 돌고 유온도 그대로입니다. 운전원의 승인, 설비로 가는 냉각 명령, 유온을 다시 읽는 재관측, 핀 세척을 위한 작업지시 등록, 결과 보고가 남아 있습니다.</a:t>
             </a:r>
           </a:p>
         </p:txBody>
@@ -2037,7 +2037,7 @@
           <a:lstStyle/>
           <a:p>
             <a:r>
-              <a:t>그림을 그렸다고 업무가 수행되지는 않습니다. 에이전트가 판단을 제출하면 누군가 운전원에게 승인 작업을 놓아야 합니다. 승인의 결과를 게이트웨이에 전해야 하고, 운전원이 한참 뒤에 응답하더라도 어디까지 왔는지를 기억하고 있어야 합니다. 그림을 읽어 이 세 가지를 하는 실행 주체가 필요합니다.</a:t>
+              <a:t>그림을 그렸다고 업무가 수행되지는 않습니다. 에이전트가 추천안을 제출하면 누군가 운전원에게 승인 작업을 놓아야 합니다. 승인의 결과를 게이트웨이에 전해야 하고, 운전원이 한참 뒤에 응답하더라도 어디까지 왔는지를 기억하고 있어야 합니다. 그림을 읽어 이 세 가지를 하는 실행 주체가 필요합니다.</a:t>
             </a:r>
           </a:p>
         </p:txBody>
@@ -2457,7 +2457,7 @@
           <a:lstStyle/>
           <a:p>
             <a:r>
-              <a:t>운전원이 10분 동안 응답하지 않은 처리 건입니다. 승인 지연 타이머가 발생하면서 토큰이 하나 더 생겨 승인 지연 알림을 지났습니다. 처음의 토큰은 운전원 승인에 그대로 있습니다. 그래서 알림이 나간 뒤에도 처리 건은 닫히지 않고, 운전원은 여전히 승인하거나 거절할 수 있습니다.</a:t>
+              <a:t>운전원이 기한이 지나도록 응답하지 않은 처리 건입니다. 승인 지연 타이머가 발생하면서 토큰이 하나 더 생겨 승인 지연 알림을 지났습니다. 처음의 토큰은 운전원 승인에 그대로 있습니다. 그래서 알림이 나간 뒤에도 처리 건은 닫히지 않고, 운전원은 여전히 승인하거나 거절할 수 있습니다.</a:t>
             </a:r>
           </a:p>
         </p:txBody>
@@ -2597,7 +2597,7 @@
           <a:lstStyle/>
           <a:p>
             <a:r>
-              <a:t>토큰이 작업에 닿으면 엔진은 그 작업의 종류에 따라 다르게 움직입니다. 사용자 작업이면 담당 역할의 작업함에 놓고 사람의 응답을 기다립니다. 서비스 작업이면 SCADA나 CMMS 같은 시스템을 호출하고 처리 결과를 받습니다. 에이전트 단계이면 지정된 에이전트에게 맡기고 판단이 제출되기를 기다립니다. 어느 경우든 작업이 끝나야 엔진이 토큰을 다음으로 넘깁니다.</a:t>
+              <a:t>토큰이 작업에 닿으면 엔진은 그 작업의 종류에 따라 다르게 움직입니다. 사용자 작업이면 담당 역할의 작업함에 놓고 사람의 응답을 기다립니다. 서비스 작업이면 SCADA나 CMMS 같은 시스템을 호출하고 처리 결과를 받습니다. 에이전트 단계이면 지정된 에이전트에게 맡기고 추천안이 제출되기를 기다립니다. 어느 경우든 작업이 끝나야 엔진이 토큰을 다음으로 넘깁니다.</a:t>
             </a:r>
           </a:p>
         </p:txBody>
@@ -2807,7 +2807,7 @@
           <a:lstStyle/>
           <a:p>
             <a:r>
-              <a:t>같은 정의에서 나온 두 처리 건입니다. 왼쪽은 승인되어 설비 명령이 나갔고, 오른쪽은 거절되어 설비 명령이 없습니다. 그런데 두 건의 상태는 똑같이 COMPLETED입니다. COMPLETED는 실행이 끝났다는 뜻일 뿐이어서, 업무가 어떻게 끝났는지는 닿은 끝 이벤트와 결과 보고로 읽어야 합니다. 승인된 뒤 회복에 미달한 경우도 끝 이벤트는 같으므로 결과 보고가 정상인지 미달인지를 봅니다.</a:t>
+              <a:t>같은 정의에서 나온 두 처리 건입니다. 왼쪽은 승인되어 설비 명령이 나갔고, 오른쪽은 거절되어 설비 명령이 없으며 결과 보고의 값은 거절을 뜻하는 반려로 적혔습니다. 그런데 두 건의 상태는 똑같이 COMPLETED입니다. COMPLETED는 실행이 끝났다는 뜻일 뿐이어서, 업무가 어떻게 끝났는지는 닿은 끝 이벤트와 결과 보고로 읽어야 합니다. 승인된 뒤 회복에 미달한 경우도 끝 이벤트는 같으므로 결과 보고가 정상인지 미달인지를 봅니다.</a:t>
             </a:r>
           </a:p>
         </p:txBody>
@@ -3017,7 +3017,7 @@
           <a:lstStyle/>
           <a:p>
             <a:r>
-              <a:t>프로세스가 실행되는 동안 일어난 일은 기록으로 남습니다. 누가 무엇을 결정했는지를 나중에 확인하려고 남기는 이런 기록을 감사 기록, Audit Log라고 합니다. 처리 건이 열릴 때, 승인이 접수되고 다음 단계로 전달될 때, 결과 보고가 나갈 때마다 한 줄씩 남습니다. 승인할 역할이 아닌 쪽이 승인을 시도해 거부된 일도 DECISION_DENIED로 남습니다.</a:t>
+              <a:t>프로세스가 실행되는 동안 일어난 일은 두 가지 기록으로 남습니다. 처리 기록은 처리 건 한 건 안에서 일어난 일을 차례로 적은 것으로, 승인이 접수되고 다음 단계로 전달될 때와 결과 보고가 나갈 때 한 줄씩 남습니다. 감사 기록, Audit Log는 누가 무엇을 결정했는지를 나중에 확인하려고 처리 건 밖의 일까지 적는 기록입니다. 처리 건이 열린 일과 정의가 배포된 일, 그리고 승인할 역할이 아닌 쪽이 승인을 시도해 거부된 일이 여기에 남습니다. 처리 건 하나를 되짚을 때는 두 기록을 함께 읽습니다.</a:t>
             </a:r>
           </a:p>
         </p:txBody>
@@ -3507,7 +3507,7 @@
           <a:lstStyle/>
           <a:p>
             <a:r>
-              <a:t>마지막 실습에서는 배포한 프로세스를 실제로 실행합니다. 쿨러 열화를 일으켜 처리 건이 열리는 것을 보고, 에이전트의 판단 뒤 운전원 승인에서 기다리는 상태를 확인합니다. 승인한 뒤에는 명령과 재관측을 거쳐 어느 끝 이벤트에 닿았는지를 읽습니다. 승인을 기다리는 상태와 끝난 상태를 처리 건의 기록으로 구분해 보시기 바랍니다.</a:t>
+              <a:t>마지막 실습에서는 배포한 프로세스를 실제로 실행합니다. 쿨러 열화를 일으켜 처리 건이 열리는 것을 보고, 에이전트의 추천안이 나온 뒤 운전원 승인에서 기다리는 상태를 확인합니다. 승인한 뒤에는 명령과 재관측을 거쳐 어느 끝 이벤트에 닿았는지를 읽습니다. 승인을 기다리는 상태와 끝난 상태를 처리 건의 기록으로 구분해 보시기 바랍니다.</a:t>
             </a:r>
           </a:p>
         </p:txBody>
@@ -3997,7 +3997,7 @@
           <a:lstStyle/>
           <a:p>
             <a:r>
-              <a:t>두 용어를 구분합니다. Task는 프로세스 안의 작업 하나로, 위쪽 괄호가 가리키는 에이전트의 추천이 그 예입니다. End-to-End는 아래쪽 괄호처럼 경보라는 시작 사건에서 끝까지의 전체이며 우리말로는 종단 간이라고 합니다. 처리 건 한 건의 실제 기록을 보면, 에이전트의 Task가 끝난 시점에는 설비 명령이 없었고 유온도 그대로였습니다. 명령과 유온 51.3도와 작업지시는 End-to-End가 끝난 시점에 남았습니다.</a:t>
+              <a:t>Task는 프로세스 안의 작업 하나로, 위쪽 괄호가 가리키는 에이전트의 추천이 그 예입니다. End-to-End는 아래쪽 괄호처럼 경보라는 시작 사건에서 끝까지의 전체이며 우리말로는 종단 간이라고 합니다. 아래의 값은 긴급 대응 프로세스가 처리한 쿨러 성능 저하 경보 한 건의 기록으로, 앞 일차에서 본 경보와 같은 종류의 다른 한 건이어서 식별자와 값이 다릅니다. 이 처리 건에서 에이전트의 Task가 끝난 시점에는 설비 명령이 없었고 유온도 그대로였습니다. 명령과 유온 51.3도와 작업지시는 End-to-End가 끝난 시점에 남았습니다.</a:t>
             </a:r>
           </a:p>
         </p:txBody>
@@ -4137,7 +4137,7 @@
           <a:lstStyle/>
           <a:p>
             <a:r>
-              <a:t>첫째와 둘째, 시작 조건과 입력입니다. 긴급 대응 프로세스를 여는 것은 사람의 조작이 아니라 경보 메시지입니다. pattern이 쿨러 성능 저하인 경보가 도착하면 처리 건이 열리고, 설비와 경보의 식별자가 입력으로 실려 뒤의 작업들이 읽습니다. 같은 경보로 처리 건이 두 번 열리지는 않습니다.</a:t>
+              <a:t>첫째와 둘째, 시작 조건과 입력입니다. 긴급 대응 프로세스를 여는 것은 사람의 조작이 아니라 경보 메시지입니다. pattern이 쿨러 성능 저하인 경보가 도착하면 처리 건이 열리고, 설비와 경보의 식별자가 입력으로 실려 뒤의 작업들이 읽습니다. 같은 경보로 처리 건이 두 번 열리지는 않습니다. 이 경보는 앞 일차에서 본 것과 같은 종류의 경보 한 건이며, 이 일차의 처리 건 기록은 모두 이 경보에서 열린 것입니다.</a:t>
             </a:r>
           </a:p>
         </p:txBody>
@@ -8905,8 +8905,8 @@
         </p:nvSpPr>
         <p:spPr>
           <a:xfrm>
-            <a:off x="548640" y="2328291"/>
-            <a:ext cx="6766560" cy="3326129"/>
+            <a:off x="548640" y="1773936"/>
+            <a:ext cx="6766560" cy="4434840"/>
           </a:xfrm>
           <a:prstGeom prst="roundRect">
             <a:avLst>
@@ -8936,8 +8936,8 @@
         </p:nvSpPr>
         <p:spPr>
           <a:xfrm>
-            <a:off x="731520" y="2465451"/>
-            <a:ext cx="6400800" cy="3051810"/>
+            <a:off x="731520" y="1911096"/>
+            <a:ext cx="6400800" cy="4160520"/>
           </a:xfrm>
           <a:prstGeom prst="rect">
             <a:avLst/>
@@ -9062,7 +9062,7 @@
         </p:nvSpPr>
         <p:spPr>
           <a:xfrm>
-            <a:off x="7635240" y="2328291"/>
+            <a:off x="7635240" y="1773936"/>
             <a:ext cx="4007815" cy="1108710"/>
           </a:xfrm>
           <a:prstGeom prst="rect">
@@ -9146,7 +9146,7 @@
         </p:nvSpPr>
         <p:spPr>
           <a:xfrm>
-            <a:off x="7635240" y="3437001"/>
+            <a:off x="7635240" y="2882646"/>
             <a:ext cx="4007815" cy="1108710"/>
           </a:xfrm>
           <a:prstGeom prst="rect">
@@ -9230,7 +9230,7 @@
         </p:nvSpPr>
         <p:spPr>
           <a:xfrm>
-            <a:off x="7635240" y="4545711"/>
+            <a:off x="7635240" y="3991356"/>
             <a:ext cx="4007815" cy="1108710"/>
           </a:xfrm>
           <a:prstGeom prst="rect">
@@ -9302,6 +9302,90 @@
                 <a:cs typeface="맑은 고딕"/>
               </a:rPr>
               <a:t>두 번 열리지 않는다.</a:t>
+            </a:r>
+          </a:p>
+        </p:txBody>
+      </p:sp>
+      <p:sp>
+        <p:nvSpPr>
+          <p:cNvPr id="11" name="TextBox 10"/>
+          <p:cNvSpPr txBox="1"/>
+          <p:nvPr/>
+        </p:nvSpPr>
+        <p:spPr>
+          <a:xfrm>
+            <a:off x="7635240" y="5100066"/>
+            <a:ext cx="4007815" cy="1108710"/>
+          </a:xfrm>
+          <a:prstGeom prst="rect">
+            <a:avLst/>
+          </a:prstGeom>
+          <a:noFill/>
+        </p:spPr>
+        <p:txBody>
+          <a:bodyPr wrap="square" anchor="ctr"/>
+          <a:lstStyle/>
+          <a:p>
+            <a:pPr algn="l">
+              <a:lnSpc>
+                <a:spcPct val="110000"/>
+              </a:lnSpc>
+              <a:spcAft>
+                <a:spcPts val="400"/>
+              </a:spcAft>
+            </a:pPr>
+            <a:r>
+              <a:rPr sz="1700" b="1">
+                <a:solidFill>
+                  <a:srgbClr val="13294B"/>
+                </a:solidFill>
+                <a:latin typeface="맑은 고딕"/>
+                <a:ea typeface="맑은 고딕"/>
+                <a:cs typeface="맑은 고딕"/>
+              </a:rPr>
+              <a:t>이 경보 한 건</a:t>
+            </a:r>
+          </a:p>
+          <a:p>
+            <a:pPr algn="l">
+              <a:lnSpc>
+                <a:spcPct val="110000"/>
+              </a:lnSpc>
+              <a:spcAft>
+                <a:spcPts val="400"/>
+              </a:spcAft>
+            </a:pPr>
+            <a:r>
+              <a:rPr sz="1400" b="0">
+                <a:solidFill>
+                  <a:srgbClr val="1F2A3A"/>
+                </a:solidFill>
+                <a:latin typeface="맑은 고딕"/>
+                <a:ea typeface="맑은 고딕"/>
+                <a:cs typeface="맑은 고딕"/>
+              </a:rPr>
+              <a:t>긴급 대응 프로세스가 처리한</a:t>
+            </a:r>
+          </a:p>
+          <a:p>
+            <a:pPr algn="l">
+              <a:lnSpc>
+                <a:spcPct val="110000"/>
+              </a:lnSpc>
+              <a:spcAft>
+                <a:spcPts val="400"/>
+              </a:spcAft>
+            </a:pPr>
+            <a:r>
+              <a:rPr sz="1400" b="0">
+                <a:solidFill>
+                  <a:srgbClr val="1F2A3A"/>
+                </a:solidFill>
+                <a:latin typeface="맑은 고딕"/>
+                <a:ea typeface="맑은 고딕"/>
+                <a:cs typeface="맑은 고딕"/>
+              </a:rPr>
+              <a:t>같은 종류의 경보 한 건이다.</a:t>
             </a:r>
           </a:p>
         </p:txBody>
@@ -11426,7 +11510,7 @@
                 <a:ea typeface="맑은 고딕"/>
                 <a:cs typeface="맑은 고딕"/>
               </a:rPr>
-              <a:t>• 추천만으로는 설비 명령이 만들어지지 않는다</a:t>
+              <a:t>• 추천안만으로는 설비 명령이 만들어지지 않는다</a:t>
             </a:r>
           </a:p>
         </p:txBody>
@@ -12597,7 +12681,7 @@
       </p:sp>
       <p:pic>
         <p:nvPicPr>
-          <p:cNvPr id="6" name="삽화:BPM주기.svg" descr="illust_8837986289016217279_1791735769.png"/>
+          <p:cNvPr id="6" name="삽화:BPM주기.svg" descr="illust_4157675040746165128_1791735769.png"/>
           <p:cNvPicPr>
             <a:picLocks noChangeAspect="1"/>
           </p:cNvPicPr>
@@ -14168,7 +14252,7 @@
       </p:sp>
       <p:pic>
         <p:nvPicPr>
-          <p:cNvPr id="6" name="삽화:현재와목표.svg" descr="illust_8683122926200665815_1791735769.png"/>
+          <p:cNvPr id="6" name="삽화:현재와목표.svg" descr="illust_4040616966297572672_1791735769.png"/>
           <p:cNvPicPr>
             <a:picLocks noChangeAspect="1"/>
           </p:cNvPicPr>
@@ -18097,7 +18181,7 @@
       </p:sp>
       <p:pic>
         <p:nvPicPr>
-          <p:cNvPr id="6" name="삽화:요소묶음.svg" descr="illust_3252944488496614248_1791735769.png"/>
+          <p:cNvPr id="6" name="삽화:요소묶음.svg" descr="illust_4130535643800794492_1791735769.png"/>
           <p:cNvPicPr>
             <a:picLocks noChangeAspect="1"/>
           </p:cNvPicPr>
@@ -18734,7 +18818,7 @@
       </p:sp>
       <p:pic>
         <p:nvPicPr>
-          <p:cNvPr id="6" name="삽화:흐름_전체.svg" descr="illust_8364352883464941294_1791735769.png"/>
+          <p:cNvPr id="6" name="삽화:흐름_전체.svg" descr="illust_1561838170229044568_1791735769.png"/>
           <p:cNvPicPr>
             <a:picLocks noChangeAspect="1"/>
           </p:cNvPicPr>
@@ -19602,7 +19686,7 @@
       </p:sp>
       <p:pic>
         <p:nvPicPr>
-          <p:cNvPr id="6" name="삽화:이벤트.svg" descr="illust_5474284620074334751_1791735769.png"/>
+          <p:cNvPr id="6" name="삽화:이벤트.svg" descr="illust_6994946918542227029_1791735769.png"/>
           <p:cNvPicPr>
             <a:picLocks noChangeAspect="1"/>
           </p:cNvPicPr>
@@ -20092,7 +20176,7 @@
       </p:sp>
       <p:pic>
         <p:nvPicPr>
-          <p:cNvPr id="6" name="삽화:작업종류.svg" descr="illust_4111669792733868039_1791735769.png"/>
+          <p:cNvPr id="6" name="삽화:작업종류.svg" descr="illust_8072834001819049153_1791735769.png"/>
           <p:cNvPicPr>
             <a:picLocks noChangeAspect="1"/>
           </p:cNvPicPr>
@@ -20750,7 +20834,7 @@
       </p:sp>
       <p:pic>
         <p:nvPicPr>
-          <p:cNvPr id="6" name="삽화:게이트웨이.svg" descr="illust_4664442136353941024_1791735769.png"/>
+          <p:cNvPr id="6" name="삽화:게이트웨이.svg" descr="illust_5454739206050703149_1791735769.png"/>
           <p:cNvPicPr>
             <a:picLocks noChangeAspect="1"/>
           </p:cNvPicPr>
@@ -22257,7 +22341,7 @@
       </p:sp>
       <p:pic>
         <p:nvPicPr>
-          <p:cNvPr id="6" name="삽화:풀과레인.svg" descr="illust_4501005401438344438_1791735769.png"/>
+          <p:cNvPr id="6" name="삽화:풀과레인.svg" descr="illust_6979021912150766013_1791735769.png"/>
           <p:cNvPicPr>
             <a:picLocks noChangeAspect="1"/>
           </p:cNvPicPr>
@@ -22873,7 +22957,7 @@
       </p:sp>
       <p:pic>
         <p:nvPicPr>
-          <p:cNvPr id="6" name="삽화:메시지흐름.svg" descr="illust_983156028435267317_1791735769.png"/>
+          <p:cNvPr id="6" name="삽화:메시지흐름.svg" descr="illust_5712395006683107682_1791735769.png"/>
           <p:cNvPicPr>
             <a:picLocks noChangeAspect="1"/>
           </p:cNvPicPr>
@@ -24103,7 +24187,7 @@
       </p:sp>
       <p:pic>
         <p:nvPicPr>
-          <p:cNvPr id="6" name="삽화:경계타이머.svg" descr="illust_7209098857802487913_1791735769.png"/>
+          <p:cNvPr id="6" name="삽화:경계타이머.svg" descr="illust_4806394438165259129_1791735769.png"/>
           <p:cNvPicPr>
             <a:picLocks noChangeAspect="1"/>
           </p:cNvPicPr>
@@ -24593,7 +24677,7 @@
       </p:sp>
       <p:pic>
         <p:nvPicPr>
-          <p:cNvPr id="6" name="삽화:승인자리.svg" descr="illust_5158529698987013931_1791735769.png"/>
+          <p:cNvPr id="6" name="삽화:승인자리.svg" descr="illust_2350848958251888599_1791735769.png"/>
           <p:cNvPicPr>
             <a:picLocks noChangeAspect="1"/>
           </p:cNvPicPr>
@@ -28278,7 +28362,7 @@
       </p:sp>
       <p:pic>
         <p:nvPicPr>
-          <p:cNvPr id="6" name="삽화:정의와인스턴스.svg" descr="illust_7150401798273319049_1791735769.png"/>
+          <p:cNvPr id="6" name="삽화:정의와인스턴스.svg" descr="illust_5079015804558588547_1791735769.png"/>
           <p:cNvPicPr>
             <a:picLocks noChangeAspect="1"/>
           </p:cNvPicPr>
@@ -28789,7 +28873,7 @@
       </p:sp>
       <p:pic>
         <p:nvPicPr>
-          <p:cNvPr id="6" name="삽화:흐름_토큰_승인대기.svg" descr="illust_5249184503074932034_1791735769.png"/>
+          <p:cNvPr id="6" name="삽화:흐름_토큰_승인대기.svg" descr="illust_2683055577022984527_1791735769.png"/>
           <p:cNvPicPr>
             <a:picLocks noChangeAspect="1"/>
           </p:cNvPicPr>
@@ -30185,7 +30269,7 @@
       </p:sp>
       <p:pic>
         <p:nvPicPr>
-          <p:cNvPr id="6" name="삽화:흐름_토큰_둘.svg" descr="illust_6534488704381414822_1791735769.png"/>
+          <p:cNvPr id="6" name="삽화:흐름_토큰_둘.svg" descr="illust_8666309684014792055_1791735769.png"/>
           <p:cNvPicPr>
             <a:picLocks noChangeAspect="1"/>
           </p:cNvPicPr>
@@ -31047,7 +31131,7 @@
                 <a:ea typeface="맑은 고딕"/>
                 <a:cs typeface="맑은 고딕"/>
               </a:rPr>
-              <a:t>추천이 끝난 업무가 되기까지의 순서와 책임을 정하는 방법</a:t>
+              <a:t>추천안이 끝난 업무가 되기까지의 순서와 책임을 정하는 방법</a:t>
             </a:r>
           </a:p>
         </p:txBody>
@@ -32571,7 +32655,7 @@
                 <a:ea typeface="맑은 고딕"/>
                 <a:cs typeface="맑은 고딕"/>
               </a:rPr>
-              <a:t>• 판단이 제출되면 끝난다</a:t>
+              <a:t>• 추천안이 제출되면 끝난다</a:t>
             </a:r>
           </a:p>
         </p:txBody>
@@ -33236,7 +33320,7 @@
                 <a:ea typeface="맑은 고딕"/>
                 <a:cs typeface="맑은 고딕"/>
               </a:rPr>
-              <a:t>추천 조치와 대안</a:t>
+              <a:t>추천안(추천 조치와 대안)</a:t>
             </a:r>
           </a:p>
         </p:txBody>
@@ -35352,7 +35436,7 @@
                 <a:ea typeface="맑은 고딕"/>
                 <a:cs typeface="맑은 고딕"/>
               </a:rPr>
-              <a:t>• 결과 보고: 거절</a:t>
+              <a:t>• 결과 보고: 거절(기록의 값은 반려)</a:t>
             </a:r>
           </a:p>
           <a:p>
@@ -36632,7 +36716,7 @@
                 <a:ea typeface="맑은 고딕"/>
                 <a:cs typeface="맑은 고딕"/>
               </a:rPr>
-              <a:t>감사 기록은 누가 무엇을 결정했는지를 나중에 확인하려고 남기는 기록이며, 처리 건의 시작과 승인과 종결이 남는다.</a:t>
+              <a:t>처리 건 안의 진행은 처리 기록에, 처리 건의 시작과 배포와 거부된 승인은 감사 기록에 남아 결정을 뒤에 확인할 수 있다.</a:t>
             </a:r>
           </a:p>
         </p:txBody>
@@ -36784,7 +36868,7 @@
         <p:spPr>
           <a:xfrm>
             <a:off x="3200400" y="1627632"/>
-            <a:ext cx="8442655" cy="347472"/>
+            <a:ext cx="6248095" cy="347472"/>
           </a:xfrm>
           <a:prstGeom prst="rect">
             <a:avLst/>
@@ -36816,14 +36900,53 @@
       </p:sp>
       <p:sp>
         <p:nvSpPr>
-          <p:cNvPr id="9" name="Rounded Rectangle 8"/>
+          <p:cNvPr id="9" name="TextBox 8"/>
+          <p:cNvSpPr txBox="1"/>
+          <p:nvPr/>
+        </p:nvSpPr>
+        <p:spPr>
+          <a:xfrm>
+            <a:off x="9448495" y="1627632"/>
+            <a:ext cx="2194560" cy="347472"/>
+          </a:xfrm>
+          <a:prstGeom prst="rect">
+            <a:avLst/>
+          </a:prstGeom>
+          <a:noFill/>
+        </p:spPr>
+        <p:txBody>
+          <a:bodyPr wrap="square" anchor="ctr"/>
+          <a:lstStyle/>
+          <a:p>
+            <a:pPr algn="l">
+              <a:lnSpc>
+                <a:spcPct val="110000"/>
+              </a:lnSpc>
+            </a:pPr>
+            <a:r>
+              <a:rPr sz="1300" b="1">
+                <a:solidFill>
+                  <a:srgbClr val="FFFFFF"/>
+                </a:solidFill>
+                <a:latin typeface="맑은 고딕"/>
+                <a:ea typeface="맑은 고딕"/>
+                <a:cs typeface="맑은 고딕"/>
+              </a:rPr>
+              <a:t>구분</a:t>
+            </a:r>
+          </a:p>
+        </p:txBody>
+      </p:sp>
+      <p:sp>
+        <p:nvSpPr>
+          <p:cNvPr id="10" name="Rounded Rectangle 9"/>
           <p:cNvSpPr/>
           <p:nvPr/>
         </p:nvSpPr>
         <p:spPr>
           <a:xfrm>
             <a:off x="548640" y="2061972"/>
-            <a:ext cx="11094415" cy="801014"/>
+            <a:ext cx="11094415" cy="656843"/>
           </a:xfrm>
           <a:prstGeom prst="roundRect">
             <a:avLst>
@@ -36847,14 +36970,14 @@
       </p:sp>
       <p:sp>
         <p:nvSpPr>
-          <p:cNvPr id="10" name="TextBox 9"/>
+          <p:cNvPr id="11" name="TextBox 10"/>
           <p:cNvSpPr txBox="1"/>
           <p:nvPr/>
         </p:nvSpPr>
         <p:spPr>
           <a:xfrm>
             <a:off x="685800" y="2029968"/>
-            <a:ext cx="2514600" cy="865022"/>
+            <a:ext cx="2514600" cy="720851"/>
           </a:xfrm>
           <a:prstGeom prst="rect">
             <a:avLst/>
@@ -36879,21 +37002,21 @@
                 <a:ea typeface="맑은 고딕"/>
                 <a:cs typeface="맑은 고딕"/>
               </a:rPr>
-              <a:t>INSTANCE_STARTED</a:t>
-            </a:r>
-          </a:p>
-        </p:txBody>
-      </p:sp>
-      <p:sp>
-        <p:nvSpPr>
-          <p:cNvPr id="11" name="TextBox 10"/>
+              <a:t>APPROVAL_ACCEPTED</a:t>
+            </a:r>
+          </a:p>
+        </p:txBody>
+      </p:sp>
+      <p:sp>
+        <p:nvSpPr>
+          <p:cNvPr id="12" name="TextBox 11"/>
           <p:cNvSpPr txBox="1"/>
           <p:nvPr/>
         </p:nvSpPr>
         <p:spPr>
           <a:xfrm>
             <a:off x="3200400" y="2029968"/>
-            <a:ext cx="8351215" cy="865022"/>
+            <a:ext cx="6156655" cy="720851"/>
           </a:xfrm>
           <a:prstGeom prst="rect">
             <a:avLst/>
@@ -36918,21 +37041,60 @@
                 <a:ea typeface="맑은 고딕"/>
                 <a:cs typeface="맑은 고딕"/>
               </a:rPr>
-              <a:t>처리 건이 열릴 때</a:t>
-            </a:r>
-          </a:p>
-        </p:txBody>
-      </p:sp>
-      <p:sp>
-        <p:nvSpPr>
-          <p:cNvPr id="12" name="Rounded Rectangle 11"/>
+              <a:t>승인이 접수될 때. 승인한 역할과 판단 id가 담긴다</a:t>
+            </a:r>
+          </a:p>
+        </p:txBody>
+      </p:sp>
+      <p:sp>
+        <p:nvSpPr>
+          <p:cNvPr id="13" name="TextBox 12"/>
+          <p:cNvSpPr txBox="1"/>
+          <p:nvPr/>
+        </p:nvSpPr>
+        <p:spPr>
+          <a:xfrm>
+            <a:off x="9448495" y="2029968"/>
+            <a:ext cx="2103120" cy="720851"/>
+          </a:xfrm>
+          <a:prstGeom prst="rect">
+            <a:avLst/>
+          </a:prstGeom>
+          <a:noFill/>
+        </p:spPr>
+        <p:txBody>
+          <a:bodyPr wrap="square" anchor="ctr"/>
+          <a:lstStyle/>
+          <a:p>
+            <a:pPr algn="l">
+              <a:lnSpc>
+                <a:spcPct val="110000"/>
+              </a:lnSpc>
+            </a:pPr>
+            <a:r>
+              <a:rPr sz="1250" b="1">
+                <a:solidFill>
+                  <a:srgbClr val="556175"/>
+                </a:solidFill>
+                <a:latin typeface="맑은 고딕"/>
+                <a:ea typeface="맑은 고딕"/>
+                <a:cs typeface="맑은 고딕"/>
+              </a:rPr>
+              <a:t>처리 기록</a:t>
+            </a:r>
+          </a:p>
+        </p:txBody>
+      </p:sp>
+      <p:sp>
+        <p:nvSpPr>
+          <p:cNvPr id="14" name="Rounded Rectangle 13"/>
           <p:cNvSpPr/>
           <p:nvPr/>
         </p:nvSpPr>
         <p:spPr>
           <a:xfrm>
-            <a:off x="548640" y="2926994"/>
-            <a:ext cx="11094415" cy="801014"/>
+            <a:off x="548640" y="2782824"/>
+            <a:ext cx="11094415" cy="656843"/>
           </a:xfrm>
           <a:prstGeom prst="roundRect">
             <a:avLst>
@@ -36956,14 +37118,14 @@
       </p:sp>
       <p:sp>
         <p:nvSpPr>
-          <p:cNvPr id="13" name="TextBox 12"/>
-          <p:cNvSpPr txBox="1"/>
-          <p:nvPr/>
-        </p:nvSpPr>
-        <p:spPr>
-          <a:xfrm>
-            <a:off x="685800" y="2894990"/>
-            <a:ext cx="2514600" cy="865022"/>
+          <p:cNvPr id="15" name="TextBox 14"/>
+          <p:cNvSpPr txBox="1"/>
+          <p:nvPr/>
+        </p:nvSpPr>
+        <p:spPr>
+          <a:xfrm>
+            <a:off x="685800" y="2750820"/>
+            <a:ext cx="2514600" cy="720851"/>
           </a:xfrm>
           <a:prstGeom prst="rect">
             <a:avLst/>
@@ -36988,21 +37150,21 @@
                 <a:ea typeface="맑은 고딕"/>
                 <a:cs typeface="맑은 고딕"/>
               </a:rPr>
-              <a:t>APPROVAL_ACCEPTED</a:t>
-            </a:r>
-          </a:p>
-        </p:txBody>
-      </p:sp>
-      <p:sp>
-        <p:nvSpPr>
-          <p:cNvPr id="14" name="TextBox 13"/>
-          <p:cNvSpPr txBox="1"/>
-          <p:nvPr/>
-        </p:nvSpPr>
-        <p:spPr>
-          <a:xfrm>
-            <a:off x="3200400" y="2894990"/>
-            <a:ext cx="8351215" cy="865022"/>
+              <a:t>APPROVAL_DELIVERY</a:t>
+            </a:r>
+          </a:p>
+        </p:txBody>
+      </p:sp>
+      <p:sp>
+        <p:nvSpPr>
+          <p:cNvPr id="16" name="TextBox 15"/>
+          <p:cNvSpPr txBox="1"/>
+          <p:nvPr/>
+        </p:nvSpPr>
+        <p:spPr>
+          <a:xfrm>
+            <a:off x="3200400" y="2750820"/>
+            <a:ext cx="6156655" cy="720851"/>
           </a:xfrm>
           <a:prstGeom prst="rect">
             <a:avLst/>
@@ -37027,21 +37189,60 @@
                 <a:ea typeface="맑은 고딕"/>
                 <a:cs typeface="맑은 고딕"/>
               </a:rPr>
-              <a:t>승인이 접수될 때. 승인한 역할과 판단 id가 담긴다</a:t>
-            </a:r>
-          </a:p>
-        </p:txBody>
-      </p:sp>
-      <p:sp>
-        <p:nvSpPr>
-          <p:cNvPr id="15" name="Rounded Rectangle 14"/>
+              <a:t>승인이 다음 단계로 전달될 때</a:t>
+            </a:r>
+          </a:p>
+        </p:txBody>
+      </p:sp>
+      <p:sp>
+        <p:nvSpPr>
+          <p:cNvPr id="17" name="TextBox 16"/>
+          <p:cNvSpPr txBox="1"/>
+          <p:nvPr/>
+        </p:nvSpPr>
+        <p:spPr>
+          <a:xfrm>
+            <a:off x="9448495" y="2750820"/>
+            <a:ext cx="2103120" cy="720851"/>
+          </a:xfrm>
+          <a:prstGeom prst="rect">
+            <a:avLst/>
+          </a:prstGeom>
+          <a:noFill/>
+        </p:spPr>
+        <p:txBody>
+          <a:bodyPr wrap="square" anchor="ctr"/>
+          <a:lstStyle/>
+          <a:p>
+            <a:pPr algn="l">
+              <a:lnSpc>
+                <a:spcPct val="110000"/>
+              </a:lnSpc>
+            </a:pPr>
+            <a:r>
+              <a:rPr sz="1250" b="1">
+                <a:solidFill>
+                  <a:srgbClr val="556175"/>
+                </a:solidFill>
+                <a:latin typeface="맑은 고딕"/>
+                <a:ea typeface="맑은 고딕"/>
+                <a:cs typeface="맑은 고딕"/>
+              </a:rPr>
+              <a:t>처리 기록</a:t>
+            </a:r>
+          </a:p>
+        </p:txBody>
+      </p:sp>
+      <p:sp>
+        <p:nvSpPr>
+          <p:cNvPr id="18" name="Rounded Rectangle 17"/>
           <p:cNvSpPr/>
           <p:nvPr/>
         </p:nvSpPr>
         <p:spPr>
           <a:xfrm>
-            <a:off x="548640" y="3792016"/>
-            <a:ext cx="11094415" cy="801014"/>
+            <a:off x="548640" y="3503676"/>
+            <a:ext cx="11094415" cy="656843"/>
           </a:xfrm>
           <a:prstGeom prst="roundRect">
             <a:avLst>
@@ -37065,14 +37266,14 @@
       </p:sp>
       <p:sp>
         <p:nvSpPr>
-          <p:cNvPr id="16" name="TextBox 15"/>
-          <p:cNvSpPr txBox="1"/>
-          <p:nvPr/>
-        </p:nvSpPr>
-        <p:spPr>
-          <a:xfrm>
-            <a:off x="685800" y="3760012"/>
-            <a:ext cx="2514600" cy="865022"/>
+          <p:cNvPr id="19" name="TextBox 18"/>
+          <p:cNvSpPr txBox="1"/>
+          <p:nvPr/>
+        </p:nvSpPr>
+        <p:spPr>
+          <a:xfrm>
+            <a:off x="685800" y="3471672"/>
+            <a:ext cx="2514600" cy="720851"/>
           </a:xfrm>
           <a:prstGeom prst="rect">
             <a:avLst/>
@@ -37097,21 +37298,21 @@
                 <a:ea typeface="맑은 고딕"/>
                 <a:cs typeface="맑은 고딕"/>
               </a:rPr>
-              <a:t>APPROVAL_DELIVERY</a:t>
-            </a:r>
-          </a:p>
-        </p:txBody>
-      </p:sp>
-      <p:sp>
-        <p:nvSpPr>
-          <p:cNvPr id="17" name="TextBox 16"/>
-          <p:cNvSpPr txBox="1"/>
-          <p:nvPr/>
-        </p:nvSpPr>
-        <p:spPr>
-          <a:xfrm>
-            <a:off x="3200400" y="3760012"/>
-            <a:ext cx="8351215" cy="865022"/>
+              <a:t>RESULT_REPORT</a:t>
+            </a:r>
+          </a:p>
+        </p:txBody>
+      </p:sp>
+      <p:sp>
+        <p:nvSpPr>
+          <p:cNvPr id="20" name="TextBox 19"/>
+          <p:cNvSpPr txBox="1"/>
+          <p:nvPr/>
+        </p:nvSpPr>
+        <p:spPr>
+          <a:xfrm>
+            <a:off x="3200400" y="3471672"/>
+            <a:ext cx="6156655" cy="720851"/>
           </a:xfrm>
           <a:prstGeom prst="rect">
             <a:avLst/>
@@ -37136,21 +37337,60 @@
                 <a:ea typeface="맑은 고딕"/>
                 <a:cs typeface="맑은 고딕"/>
               </a:rPr>
-              <a:t>승인이 다음 단계로 전달될 때</a:t>
-            </a:r>
-          </a:p>
-        </p:txBody>
-      </p:sp>
-      <p:sp>
-        <p:nvSpPr>
-          <p:cNvPr id="18" name="Rounded Rectangle 17"/>
+              <a:t>결과 보고가 나갈 때. 보고의 본문이 담긴다</a:t>
+            </a:r>
+          </a:p>
+        </p:txBody>
+      </p:sp>
+      <p:sp>
+        <p:nvSpPr>
+          <p:cNvPr id="21" name="TextBox 20"/>
+          <p:cNvSpPr txBox="1"/>
+          <p:nvPr/>
+        </p:nvSpPr>
+        <p:spPr>
+          <a:xfrm>
+            <a:off x="9448495" y="3471672"/>
+            <a:ext cx="2103120" cy="720851"/>
+          </a:xfrm>
+          <a:prstGeom prst="rect">
+            <a:avLst/>
+          </a:prstGeom>
+          <a:noFill/>
+        </p:spPr>
+        <p:txBody>
+          <a:bodyPr wrap="square" anchor="ctr"/>
+          <a:lstStyle/>
+          <a:p>
+            <a:pPr algn="l">
+              <a:lnSpc>
+                <a:spcPct val="110000"/>
+              </a:lnSpc>
+            </a:pPr>
+            <a:r>
+              <a:rPr sz="1250" b="1">
+                <a:solidFill>
+                  <a:srgbClr val="556175"/>
+                </a:solidFill>
+                <a:latin typeface="맑은 고딕"/>
+                <a:ea typeface="맑은 고딕"/>
+                <a:cs typeface="맑은 고딕"/>
+              </a:rPr>
+              <a:t>처리 기록</a:t>
+            </a:r>
+          </a:p>
+        </p:txBody>
+      </p:sp>
+      <p:sp>
+        <p:nvSpPr>
+          <p:cNvPr id="22" name="Rounded Rectangle 21"/>
           <p:cNvSpPr/>
           <p:nvPr/>
         </p:nvSpPr>
         <p:spPr>
           <a:xfrm>
-            <a:off x="548640" y="4657039"/>
-            <a:ext cx="11094415" cy="801014"/>
+            <a:off x="548640" y="4224528"/>
+            <a:ext cx="11094415" cy="656843"/>
           </a:xfrm>
           <a:prstGeom prst="roundRect">
             <a:avLst>
@@ -37174,14 +37414,14 @@
       </p:sp>
       <p:sp>
         <p:nvSpPr>
-          <p:cNvPr id="19" name="TextBox 18"/>
-          <p:cNvSpPr txBox="1"/>
-          <p:nvPr/>
-        </p:nvSpPr>
-        <p:spPr>
-          <a:xfrm>
-            <a:off x="685800" y="4625035"/>
-            <a:ext cx="2514600" cy="865022"/>
+          <p:cNvPr id="23" name="TextBox 22"/>
+          <p:cNvSpPr txBox="1"/>
+          <p:nvPr/>
+        </p:nvSpPr>
+        <p:spPr>
+          <a:xfrm>
+            <a:off x="685800" y="4192524"/>
+            <a:ext cx="2514600" cy="720851"/>
           </a:xfrm>
           <a:prstGeom prst="rect">
             <a:avLst/>
@@ -37206,21 +37446,21 @@
                 <a:ea typeface="맑은 고딕"/>
                 <a:cs typeface="맑은 고딕"/>
               </a:rPr>
-              <a:t>RESULT_REPORT</a:t>
-            </a:r>
-          </a:p>
-        </p:txBody>
-      </p:sp>
-      <p:sp>
-        <p:nvSpPr>
-          <p:cNvPr id="20" name="TextBox 19"/>
-          <p:cNvSpPr txBox="1"/>
-          <p:nvPr/>
-        </p:nvSpPr>
-        <p:spPr>
-          <a:xfrm>
-            <a:off x="3200400" y="4625035"/>
-            <a:ext cx="8351215" cy="865022"/>
+              <a:t>INSTANCE_STARTED</a:t>
+            </a:r>
+          </a:p>
+        </p:txBody>
+      </p:sp>
+      <p:sp>
+        <p:nvSpPr>
+          <p:cNvPr id="24" name="TextBox 23"/>
+          <p:cNvSpPr txBox="1"/>
+          <p:nvPr/>
+        </p:nvSpPr>
+        <p:spPr>
+          <a:xfrm>
+            <a:off x="3200400" y="4192524"/>
+            <a:ext cx="6156655" cy="720851"/>
           </a:xfrm>
           <a:prstGeom prst="rect">
             <a:avLst/>
@@ -37245,21 +37485,208 @@
                 <a:ea typeface="맑은 고딕"/>
                 <a:cs typeface="맑은 고딕"/>
               </a:rPr>
-              <a:t>결과 보고가 나갈 때. 보고의 본문이 담긴다</a:t>
-            </a:r>
-          </a:p>
-        </p:txBody>
-      </p:sp>
-      <p:sp>
-        <p:nvSpPr>
-          <p:cNvPr id="21" name="Rounded Rectangle 20"/>
+              <a:t>처리 건이 열릴 때</a:t>
+            </a:r>
+          </a:p>
+        </p:txBody>
+      </p:sp>
+      <p:sp>
+        <p:nvSpPr>
+          <p:cNvPr id="25" name="TextBox 24"/>
+          <p:cNvSpPr txBox="1"/>
+          <p:nvPr/>
+        </p:nvSpPr>
+        <p:spPr>
+          <a:xfrm>
+            <a:off x="9448495" y="4192524"/>
+            <a:ext cx="2103120" cy="720851"/>
+          </a:xfrm>
+          <a:prstGeom prst="rect">
+            <a:avLst/>
+          </a:prstGeom>
+          <a:noFill/>
+        </p:spPr>
+        <p:txBody>
+          <a:bodyPr wrap="square" anchor="ctr"/>
+          <a:lstStyle/>
+          <a:p>
+            <a:pPr algn="l">
+              <a:lnSpc>
+                <a:spcPct val="110000"/>
+              </a:lnSpc>
+            </a:pPr>
+            <a:r>
+              <a:rPr sz="1250" b="1">
+                <a:solidFill>
+                  <a:srgbClr val="556175"/>
+                </a:solidFill>
+                <a:latin typeface="맑은 고딕"/>
+                <a:ea typeface="맑은 고딕"/>
+                <a:cs typeface="맑은 고딕"/>
+              </a:rPr>
+              <a:t>감사 기록</a:t>
+            </a:r>
+          </a:p>
+        </p:txBody>
+      </p:sp>
+      <p:sp>
+        <p:nvSpPr>
+          <p:cNvPr id="26" name="Rounded Rectangle 25"/>
           <p:cNvSpPr/>
           <p:nvPr/>
         </p:nvSpPr>
         <p:spPr>
           <a:xfrm>
-            <a:off x="548640" y="5522061"/>
-            <a:ext cx="11094415" cy="801014"/>
+            <a:off x="548640" y="4945380"/>
+            <a:ext cx="11094415" cy="656843"/>
+          </a:xfrm>
+          <a:prstGeom prst="roundRect">
+            <a:avLst>
+              <a:gd name="adj" fmla="val 8000"/>
+            </a:avLst>
+          </a:prstGeom>
+          <a:solidFill>
+            <a:srgbClr val="F3F6F9"/>
+          </a:solidFill>
+          <a:ln>
+            <a:noFill/>
+          </a:ln>
+        </p:spPr>
+        <p:txBody>
+          <a:bodyPr rtlCol="0" anchor="ctr"/>
+          <a:lstStyle/>
+          <a:p>
+            <a:pPr algn="ctr"/>
+          </a:p>
+        </p:txBody>
+      </p:sp>
+      <p:sp>
+        <p:nvSpPr>
+          <p:cNvPr id="27" name="TextBox 26"/>
+          <p:cNvSpPr txBox="1"/>
+          <p:nvPr/>
+        </p:nvSpPr>
+        <p:spPr>
+          <a:xfrm>
+            <a:off x="685800" y="4913376"/>
+            <a:ext cx="2514600" cy="720851"/>
+          </a:xfrm>
+          <a:prstGeom prst="rect">
+            <a:avLst/>
+          </a:prstGeom>
+          <a:noFill/>
+        </p:spPr>
+        <p:txBody>
+          <a:bodyPr wrap="square" anchor="ctr"/>
+          <a:lstStyle/>
+          <a:p>
+            <a:pPr algn="l">
+              <a:lnSpc>
+                <a:spcPct val="110000"/>
+              </a:lnSpc>
+            </a:pPr>
+            <a:r>
+              <a:rPr sz="1600" b="1">
+                <a:solidFill>
+                  <a:srgbClr val="13294B"/>
+                </a:solidFill>
+                <a:latin typeface="맑은 고딕"/>
+                <a:ea typeface="맑은 고딕"/>
+                <a:cs typeface="맑은 고딕"/>
+              </a:rPr>
+              <a:t>DEFINITION_DEPLOYED</a:t>
+            </a:r>
+          </a:p>
+        </p:txBody>
+      </p:sp>
+      <p:sp>
+        <p:nvSpPr>
+          <p:cNvPr id="28" name="TextBox 27"/>
+          <p:cNvSpPr txBox="1"/>
+          <p:nvPr/>
+        </p:nvSpPr>
+        <p:spPr>
+          <a:xfrm>
+            <a:off x="3200400" y="4913376"/>
+            <a:ext cx="6156655" cy="720851"/>
+          </a:xfrm>
+          <a:prstGeom prst="rect">
+            <a:avLst/>
+          </a:prstGeom>
+          <a:noFill/>
+        </p:spPr>
+        <p:txBody>
+          <a:bodyPr wrap="square" anchor="ctr"/>
+          <a:lstStyle/>
+          <a:p>
+            <a:pPr algn="l">
+              <a:lnSpc>
+                <a:spcPct val="110000"/>
+              </a:lnSpc>
+            </a:pPr>
+            <a:r>
+              <a:rPr sz="1400" b="0">
+                <a:solidFill>
+                  <a:srgbClr val="1F2A3A"/>
+                </a:solidFill>
+                <a:latin typeface="맑은 고딕"/>
+                <a:ea typeface="맑은 고딕"/>
+                <a:cs typeface="맑은 고딕"/>
+              </a:rPr>
+              <a:t>프로세스 정의의 판본이 배포될 때</a:t>
+            </a:r>
+          </a:p>
+        </p:txBody>
+      </p:sp>
+      <p:sp>
+        <p:nvSpPr>
+          <p:cNvPr id="29" name="TextBox 28"/>
+          <p:cNvSpPr txBox="1"/>
+          <p:nvPr/>
+        </p:nvSpPr>
+        <p:spPr>
+          <a:xfrm>
+            <a:off x="9448495" y="4913376"/>
+            <a:ext cx="2103120" cy="720851"/>
+          </a:xfrm>
+          <a:prstGeom prst="rect">
+            <a:avLst/>
+          </a:prstGeom>
+          <a:noFill/>
+        </p:spPr>
+        <p:txBody>
+          <a:bodyPr wrap="square" anchor="ctr"/>
+          <a:lstStyle/>
+          <a:p>
+            <a:pPr algn="l">
+              <a:lnSpc>
+                <a:spcPct val="110000"/>
+              </a:lnSpc>
+            </a:pPr>
+            <a:r>
+              <a:rPr sz="1250" b="1">
+                <a:solidFill>
+                  <a:srgbClr val="556175"/>
+                </a:solidFill>
+                <a:latin typeface="맑은 고딕"/>
+                <a:ea typeface="맑은 고딕"/>
+                <a:cs typeface="맑은 고딕"/>
+              </a:rPr>
+              <a:t>감사 기록</a:t>
+            </a:r>
+          </a:p>
+        </p:txBody>
+      </p:sp>
+      <p:sp>
+        <p:nvSpPr>
+          <p:cNvPr id="30" name="Rounded Rectangle 29"/>
+          <p:cNvSpPr/>
+          <p:nvPr/>
+        </p:nvSpPr>
+        <p:spPr>
+          <a:xfrm>
+            <a:off x="548640" y="5666232"/>
+            <a:ext cx="11094415" cy="656843"/>
           </a:xfrm>
           <a:prstGeom prst="roundRect">
             <a:avLst>
@@ -37283,14 +37710,14 @@
       </p:sp>
       <p:sp>
         <p:nvSpPr>
-          <p:cNvPr id="22" name="TextBox 21"/>
-          <p:cNvSpPr txBox="1"/>
-          <p:nvPr/>
-        </p:nvSpPr>
-        <p:spPr>
-          <a:xfrm>
-            <a:off x="685800" y="5490057"/>
-            <a:ext cx="2514600" cy="865022"/>
+          <p:cNvPr id="31" name="TextBox 30"/>
+          <p:cNvSpPr txBox="1"/>
+          <p:nvPr/>
+        </p:nvSpPr>
+        <p:spPr>
+          <a:xfrm>
+            <a:off x="685800" y="5634228"/>
+            <a:ext cx="2514600" cy="720851"/>
           </a:xfrm>
           <a:prstGeom prst="rect">
             <a:avLst/>
@@ -37322,14 +37749,14 @@
       </p:sp>
       <p:sp>
         <p:nvSpPr>
-          <p:cNvPr id="23" name="TextBox 22"/>
-          <p:cNvSpPr txBox="1"/>
-          <p:nvPr/>
-        </p:nvSpPr>
-        <p:spPr>
-          <a:xfrm>
-            <a:off x="3200400" y="5490057"/>
-            <a:ext cx="8351215" cy="865022"/>
+          <p:cNvPr id="32" name="TextBox 31"/>
+          <p:cNvSpPr txBox="1"/>
+          <p:nvPr/>
+        </p:nvSpPr>
+        <p:spPr>
+          <a:xfrm>
+            <a:off x="3200400" y="5634228"/>
+            <a:ext cx="6156655" cy="720851"/>
           </a:xfrm>
           <a:prstGeom prst="rect">
             <a:avLst/>
@@ -37355,6 +37782,45 @@
                 <a:cs typeface="맑은 고딕"/>
               </a:rPr>
               <a:t>승인 역할이 아닌 쪽이 승인을 시도해 거부될 때</a:t>
+            </a:r>
+          </a:p>
+        </p:txBody>
+      </p:sp>
+      <p:sp>
+        <p:nvSpPr>
+          <p:cNvPr id="33" name="TextBox 32"/>
+          <p:cNvSpPr txBox="1"/>
+          <p:nvPr/>
+        </p:nvSpPr>
+        <p:spPr>
+          <a:xfrm>
+            <a:off x="9448495" y="5634228"/>
+            <a:ext cx="2103120" cy="720851"/>
+          </a:xfrm>
+          <a:prstGeom prst="rect">
+            <a:avLst/>
+          </a:prstGeom>
+          <a:noFill/>
+        </p:spPr>
+        <p:txBody>
+          <a:bodyPr wrap="square" anchor="ctr"/>
+          <a:lstStyle/>
+          <a:p>
+            <a:pPr algn="l">
+              <a:lnSpc>
+                <a:spcPct val="110000"/>
+              </a:lnSpc>
+            </a:pPr>
+            <a:r>
+              <a:rPr sz="1250" b="1">
+                <a:solidFill>
+                  <a:srgbClr val="1A6FC4"/>
+                </a:solidFill>
+                <a:latin typeface="맑은 고딕"/>
+                <a:ea typeface="맑은 고딕"/>
+                <a:cs typeface="맑은 고딕"/>
+              </a:rPr>
+              <a:t>감사 기록</a:t>
             </a:r>
           </a:p>
         </p:txBody>
@@ -37700,7 +38166,7 @@
                 <a:ea typeface="맑은 고딕"/>
                 <a:cs typeface="맑은 고딕"/>
               </a:rPr>
-              <a:t>이 실습을 마치면 bpmn.io에서 요소를 놓고 이어 만든 그림이 .bpmn 파일 하나로 저장되고 다시 열린다.</a:t>
+              <a:t>bpmn.io에서 요소를 놓고 이어 만든 그림은 .bpmn 파일 하나로 저장되고, 그 파일을 불러오면 같은 그림이 다시 열린다.</a:t>
             </a:r>
           </a:p>
         </p:txBody>
@@ -39156,7 +39622,7 @@
                 <a:ea typeface="맑은 고딕"/>
                 <a:cs typeface="맑은 고딕"/>
               </a:rPr>
-              <a:t>에이전트가 팬 최대 운전을 추천한 시점에 유온은 그대로이며, 승인에서 결과 보고까지 다섯 가지 일이 남아 있다.</a:t>
+              <a:t>팬 최대 운전을 권하는 추천안이 나온 시점에 유온은 그대로이며, 승인에서 결과 보고까지 다섯 가지 일이 남아 있다.</a:t>
             </a:r>
           </a:p>
         </p:txBody>
@@ -39231,7 +39697,7 @@
       </p:sp>
       <p:pic>
         <p:nvPicPr>
-          <p:cNvPr id="6" name="삽화:남은일_추천뒤.svg" descr="illust_711583469774950697_1791735769.png"/>
+          <p:cNvPr id="6" name="삽화:남은일_추천뒤.svg" descr="illust_8808568101484667171_1791735769.png"/>
           <p:cNvPicPr>
             <a:picLocks noChangeAspect="1"/>
           </p:cNvPicPr>
@@ -43380,7 +43846,7 @@
                 <a:ea typeface="맑은 고딕"/>
                 <a:cs typeface="맑은 고딕"/>
               </a:rPr>
-              <a:t>이 실습을 마치면 직접 그린 프로세스의 시작 이벤트와 작업마다 그것을 열 경보와 수행할 쪽이 이어진다.</a:t>
+              <a:t>그림에는 순서와 갈림만 있으므로, 시작 이벤트를 열 경보와 작업마다 수행할 쪽을 HYD에서 이어야 실행할 수 있다.</a:t>
             </a:r>
           </a:p>
         </p:txBody>
@@ -45779,8 +46245,8 @@
         </p:nvSpPr>
         <p:spPr>
           <a:xfrm>
-            <a:off x="548640" y="2626423"/>
-            <a:ext cx="1911644" cy="2729864"/>
+            <a:off x="548640" y="2335911"/>
+            <a:ext cx="1911644" cy="3310889"/>
           </a:xfrm>
           <a:prstGeom prst="roundRect">
             <a:avLst>
@@ -45810,7 +46276,7 @@
         </p:nvSpPr>
         <p:spPr>
           <a:xfrm>
-            <a:off x="1138702" y="2809303"/>
+            <a:off x="1138702" y="2518791"/>
             <a:ext cx="731520" cy="731520"/>
           </a:xfrm>
           <a:prstGeom prst="ellipse">
@@ -45847,7 +46313,7 @@
         </p:blipFill>
         <p:spPr>
           <a:xfrm>
-            <a:off x="1292321" y="2962922"/>
+            <a:off x="1292321" y="2672410"/>
             <a:ext cx="424281" cy="424281"/>
           </a:xfrm>
           <a:prstGeom prst="rect">
@@ -45863,8 +46329,8 @@
         </p:nvSpPr>
         <p:spPr>
           <a:xfrm>
-            <a:off x="621792" y="3613975"/>
-            <a:ext cx="1765340" cy="1669160"/>
+            <a:off x="621792" y="3323463"/>
+            <a:ext cx="1765340" cy="2250185"/>
           </a:xfrm>
           <a:prstGeom prst="rect">
             <a:avLst/>
@@ -45934,7 +46400,7 @@
                 <a:ea typeface="맑은 고딕"/>
                 <a:cs typeface="맑은 고딕"/>
               </a:rPr>
-              <a:t>추천을 검토해</a:t>
+              <a:t>추천안을 검토해</a:t>
             </a:r>
           </a:p>
           <a:p>
@@ -45997,8 +46463,8 @@
         </p:nvSpPr>
         <p:spPr>
           <a:xfrm>
-            <a:off x="2844332" y="2626423"/>
-            <a:ext cx="1911644" cy="2729864"/>
+            <a:off x="2844332" y="2335911"/>
+            <a:ext cx="1911644" cy="3310889"/>
           </a:xfrm>
           <a:prstGeom prst="roundRect">
             <a:avLst>
@@ -46028,7 +46494,7 @@
         </p:nvSpPr>
         <p:spPr>
           <a:xfrm>
-            <a:off x="3434394" y="2809303"/>
+            <a:off x="3434394" y="2518791"/>
             <a:ext cx="731520" cy="731520"/>
           </a:xfrm>
           <a:prstGeom prst="ellipse">
@@ -46065,7 +46531,7 @@
         </p:blipFill>
         <p:spPr>
           <a:xfrm>
-            <a:off x="3588014" y="2962922"/>
+            <a:off x="3588014" y="2672410"/>
             <a:ext cx="424281" cy="424281"/>
           </a:xfrm>
           <a:prstGeom prst="rect">
@@ -46081,8 +46547,8 @@
         </p:nvSpPr>
         <p:spPr>
           <a:xfrm>
-            <a:off x="2917484" y="3613975"/>
-            <a:ext cx="1765340" cy="1669160"/>
+            <a:off x="2917484" y="3323463"/>
+            <a:ext cx="1765340" cy="2250185"/>
           </a:xfrm>
           <a:prstGeom prst="rect">
             <a:avLst/>
@@ -46215,8 +46681,8 @@
         </p:nvSpPr>
         <p:spPr>
           <a:xfrm>
-            <a:off x="5140025" y="2626423"/>
-            <a:ext cx="1911644" cy="2729864"/>
+            <a:off x="5140025" y="2335911"/>
+            <a:ext cx="1911644" cy="3310889"/>
           </a:xfrm>
           <a:prstGeom prst="roundRect">
             <a:avLst>
@@ -46246,7 +46712,7 @@
         </p:nvSpPr>
         <p:spPr>
           <a:xfrm>
-            <a:off x="5730087" y="2809303"/>
+            <a:off x="5730087" y="2518791"/>
             <a:ext cx="731520" cy="731520"/>
           </a:xfrm>
           <a:prstGeom prst="ellipse">
@@ -46283,7 +46749,7 @@
         </p:blipFill>
         <p:spPr>
           <a:xfrm>
-            <a:off x="5883706" y="2962922"/>
+            <a:off x="5883706" y="2672410"/>
             <a:ext cx="424281" cy="424281"/>
           </a:xfrm>
           <a:prstGeom prst="rect">
@@ -46299,8 +46765,8 @@
         </p:nvSpPr>
         <p:spPr>
           <a:xfrm>
-            <a:off x="5213177" y="3613975"/>
-            <a:ext cx="1765340" cy="1669160"/>
+            <a:off x="5213177" y="3323463"/>
+            <a:ext cx="1765340" cy="2250185"/>
           </a:xfrm>
           <a:prstGeom prst="rect">
             <a:avLst/>
@@ -46433,8 +46899,8 @@
         </p:nvSpPr>
         <p:spPr>
           <a:xfrm>
-            <a:off x="7435717" y="2626423"/>
-            <a:ext cx="1911644" cy="2729864"/>
+            <a:off x="7435717" y="2335911"/>
+            <a:ext cx="1911644" cy="3310889"/>
           </a:xfrm>
           <a:prstGeom prst="roundRect">
             <a:avLst>
@@ -46464,7 +46930,7 @@
         </p:nvSpPr>
         <p:spPr>
           <a:xfrm>
-            <a:off x="8025780" y="2809303"/>
+            <a:off x="8025780" y="2518791"/>
             <a:ext cx="731520" cy="731520"/>
           </a:xfrm>
           <a:prstGeom prst="ellipse">
@@ -46501,7 +46967,7 @@
         </p:blipFill>
         <p:spPr>
           <a:xfrm>
-            <a:off x="8179399" y="2962922"/>
+            <a:off x="8179399" y="2672410"/>
             <a:ext cx="424281" cy="424281"/>
           </a:xfrm>
           <a:prstGeom prst="rect">
@@ -46517,8 +46983,8 @@
         </p:nvSpPr>
         <p:spPr>
           <a:xfrm>
-            <a:off x="7508869" y="3613975"/>
-            <a:ext cx="1765340" cy="1669160"/>
+            <a:off x="7508869" y="3323463"/>
+            <a:ext cx="1765340" cy="2250185"/>
           </a:xfrm>
           <a:prstGeom prst="rect">
             <a:avLst/>
@@ -46588,7 +47054,7 @@
                 <a:ea typeface="맑은 고딕"/>
                 <a:cs typeface="맑은 고딕"/>
               </a:rPr>
-              <a:t>원인을 없앨 정비를</a:t>
+              <a:t>Computerized Maintenance</a:t>
             </a:r>
           </a:p>
           <a:p>
@@ -46609,7 +47075,28 @@
                 <a:ea typeface="맑은 고딕"/>
                 <a:cs typeface="맑은 고딕"/>
               </a:rPr>
-              <a:t>작업지시로 등록한다</a:t>
+              <a:t>Management System</a:t>
+            </a:r>
+          </a:p>
+          <a:p>
+            <a:pPr algn="ctr">
+              <a:lnSpc>
+                <a:spcPct val="110000"/>
+              </a:lnSpc>
+              <a:spcAft>
+                <a:spcPts val="400"/>
+              </a:spcAft>
+            </a:pPr>
+            <a:r>
+              <a:rPr sz="1250" b="0">
+                <a:solidFill>
+                  <a:srgbClr val="1F2A3A"/>
+                </a:solidFill>
+                <a:latin typeface="맑은 고딕"/>
+                <a:ea typeface="맑은 고딕"/>
+                <a:cs typeface="맑은 고딕"/>
+              </a:rPr>
+              <a:t>정비를 작업지시로 등록한다</a:t>
             </a:r>
           </a:p>
         </p:txBody>
@@ -46651,8 +47138,8 @@
         </p:nvSpPr>
         <p:spPr>
           <a:xfrm>
-            <a:off x="9731410" y="2626423"/>
-            <a:ext cx="1911644" cy="2729864"/>
+            <a:off x="9731410" y="2335911"/>
+            <a:ext cx="1911644" cy="3310889"/>
           </a:xfrm>
           <a:prstGeom prst="roundRect">
             <a:avLst>
@@ -46682,7 +47169,7 @@
         </p:nvSpPr>
         <p:spPr>
           <a:xfrm>
-            <a:off x="10321472" y="2809303"/>
+            <a:off x="10321472" y="2518791"/>
             <a:ext cx="731520" cy="731520"/>
           </a:xfrm>
           <a:prstGeom prst="ellipse">
@@ -46719,7 +47206,7 @@
         </p:blipFill>
         <p:spPr>
           <a:xfrm>
-            <a:off x="10475092" y="2962922"/>
+            <a:off x="10475092" y="2672410"/>
             <a:ext cx="424281" cy="424281"/>
           </a:xfrm>
           <a:prstGeom prst="rect">
@@ -46735,8 +47222,8 @@
         </p:nvSpPr>
         <p:spPr>
           <a:xfrm>
-            <a:off x="9804562" y="3613975"/>
-            <a:ext cx="1765340" cy="1669160"/>
+            <a:off x="9804562" y="3323463"/>
+            <a:ext cx="1765340" cy="2250185"/>
           </a:xfrm>
           <a:prstGeom prst="rect">
             <a:avLst/>
@@ -46931,7 +47418,7 @@
                 <a:ea typeface="맑은 고딕"/>
                 <a:cs typeface="맑은 고딕"/>
               </a:rPr>
-              <a:t>이 실습을 마치면 직접 배포한 프로세스로 열린 처리 건 한 건과 그 처리 기록이 남는다.</a:t>
+              <a:t>배포한 프로세스를 쿨러 열화로 실행하면 처리 건 한 건이 열리고, 그 처리 기록에서 대기와 완료를 구분해 읽는다.</a:t>
             </a:r>
           </a:p>
         </p:txBody>
@@ -47367,7 +47854,7 @@
                 <a:ea typeface="맑은 고딕"/>
                 <a:cs typeface="맑은 고딕"/>
               </a:rPr>
-              <a:t>에이전트의 판단 뒤 운전원 승인에서 기다리는 상태를 읽는다</a:t>
+              <a:t>에이전트의 추천안이 나온 뒤 운전원 승인에서 기다리는 상태를 읽는다</a:t>
             </a:r>
           </a:p>
         </p:txBody>
@@ -50503,7 +50990,7 @@
                 <a:ea typeface="맑은 고딕"/>
                 <a:cs typeface="맑은 고딕"/>
               </a:rPr>
-              <a:t>에이전트가 팬 최대 운전을 추천해 판단을 제출했고, 처리 건은 운전원 승인에서 기다리고 있다.</a:t>
+              <a:t>에이전트가 팬 최대 운전을 권하는 추천안을 제출했고, 처리 건은 운전원 승인에서 기다리고 있다.</a:t>
             </a:r>
           </a:p>
         </p:txBody>
@@ -50779,7 +51266,7 @@
                 <a:ea typeface="맑은 고딕"/>
                 <a:cs typeface="맑은 고딕"/>
               </a:rPr>
-              <a:t>추천을 제출한 에이전트</a:t>
+              <a:t>추천안을 제출한 에이전트</a:t>
             </a:r>
           </a:p>
         </p:txBody>
@@ -53237,7 +53724,7 @@
                 <a:ea typeface="맑은 고딕"/>
                 <a:cs typeface="맑은 고딕"/>
               </a:rPr>
-              <a:t>에이전트의 추천, 운전원의 승인, 시스템의 명령과 기록이 한 순서로 이어진다.</a:t>
+              <a:t>에이전트의 추천안, 운전원의 승인, 시스템의 명령과 기록이 한 순서로 이어진다.</a:t>
             </a:r>
           </a:p>
         </p:txBody>
@@ -53550,7 +54037,7 @@
       </p:sp>
       <p:pic>
         <p:nvPicPr>
-          <p:cNvPr id="6" name="삽화:남은일_종단.svg" descr="illust_6208647358577896618_1791735769.png"/>
+          <p:cNvPr id="6" name="삽화:남은일_종단.svg" descr="illust_7064735421616271760_1791735769.png"/>
           <p:cNvPicPr>
             <a:picLocks noChangeAspect="1"/>
           </p:cNvPicPr>
@@ -54072,6 +54559,90 @@
                 <a:cs typeface="맑은 고딕"/>
               </a:rPr>
               <a:t>끝난 시점: 명령 CMD-1010-0001-01d1, 유온 51.3 ℃, 작업지시 WO-1010-1198</a:t>
+            </a:r>
+          </a:p>
+        </p:txBody>
+      </p:sp>
+      <p:sp>
+        <p:nvSpPr>
+          <p:cNvPr id="17" name="TextBox 16"/>
+          <p:cNvSpPr txBox="1"/>
+          <p:nvPr/>
+        </p:nvSpPr>
+        <p:spPr>
+          <a:xfrm>
+            <a:off x="7186797" y="1769455"/>
+            <a:ext cx="3927418" cy="678053"/>
+          </a:xfrm>
+          <a:prstGeom prst="rect">
+            <a:avLst/>
+          </a:prstGeom>
+          <a:noFill/>
+        </p:spPr>
+        <p:txBody>
+          <a:bodyPr wrap="square" anchor="t"/>
+          <a:lstStyle/>
+          <a:p>
+            <a:pPr algn="ctr">
+              <a:lnSpc>
+                <a:spcPct val="110000"/>
+              </a:lnSpc>
+              <a:spcAft>
+                <a:spcPts val="100"/>
+              </a:spcAft>
+            </a:pPr>
+            <a:r>
+              <a:rPr sz="1350" b="1">
+                <a:solidFill>
+                  <a:srgbClr val="13294B"/>
+                </a:solidFill>
+                <a:latin typeface="맑은 고딕"/>
+                <a:ea typeface="맑은 고딕"/>
+                <a:cs typeface="맑은 고딕"/>
+              </a:rPr>
+              <a:t>이 기록의 처리 건</a:t>
+            </a:r>
+          </a:p>
+          <a:p>
+            <a:pPr algn="ctr">
+              <a:lnSpc>
+                <a:spcPct val="110000"/>
+              </a:lnSpc>
+              <a:spcAft>
+                <a:spcPts val="100"/>
+              </a:spcAft>
+            </a:pPr>
+            <a:r>
+              <a:rPr sz="1100" b="0">
+                <a:solidFill>
+                  <a:srgbClr val="556175"/>
+                </a:solidFill>
+                <a:latin typeface="맑은 고딕"/>
+                <a:ea typeface="맑은 고딕"/>
+                <a:cs typeface="맑은 고딕"/>
+              </a:rPr>
+              <a:t>긴급 대응 프로세스가 처리한</a:t>
+            </a:r>
+          </a:p>
+          <a:p>
+            <a:pPr algn="ctr">
+              <a:lnSpc>
+                <a:spcPct val="110000"/>
+              </a:lnSpc>
+              <a:spcAft>
+                <a:spcPts val="100"/>
+              </a:spcAft>
+            </a:pPr>
+            <a:r>
+              <a:rPr sz="1100" b="0">
+                <a:solidFill>
+                  <a:srgbClr val="556175"/>
+                </a:solidFill>
+                <a:latin typeface="맑은 고딕"/>
+                <a:ea typeface="맑은 고딕"/>
+                <a:cs typeface="맑은 고딕"/>
+              </a:rPr>
+              <a:t>같은 종류의 경보 한 건</a:t>
             </a:r>
           </a:p>
         </p:txBody>

--- a/docs/교재/실전반/06일차/실전반_06일차.pptx
+++ b/docs/교재/실전반/06일차/실전반_06일차.pptx
@@ -12681,7 +12681,7 @@
       </p:sp>
       <p:pic>
         <p:nvPicPr>
-          <p:cNvPr id="6" name="삽화:BPM주기.svg" descr="illust_4157675040746165128_1791735769.png"/>
+          <p:cNvPr id="6" name="삽화:BPM주기.svg" descr="illust_1805514910391798302_1791735769.png"/>
           <p:cNvPicPr>
             <a:picLocks noChangeAspect="1"/>
           </p:cNvPicPr>
@@ -14252,7 +14252,7 @@
       </p:sp>
       <p:pic>
         <p:nvPicPr>
-          <p:cNvPr id="6" name="삽화:현재와목표.svg" descr="illust_4040616966297572672_1791735769.png"/>
+          <p:cNvPr id="6" name="삽화:현재와목표.svg" descr="illust_5001280623791617068_1791735769.png"/>
           <p:cNvPicPr>
             <a:picLocks noChangeAspect="1"/>
           </p:cNvPicPr>
@@ -18181,7 +18181,7 @@
       </p:sp>
       <p:pic>
         <p:nvPicPr>
-          <p:cNvPr id="6" name="삽화:요소묶음.svg" descr="illust_4130535643800794492_1791735769.png"/>
+          <p:cNvPr id="6" name="삽화:요소묶음.svg" descr="illust_7175754200771628015_1791735769.png"/>
           <p:cNvPicPr>
             <a:picLocks noChangeAspect="1"/>
           </p:cNvPicPr>
@@ -18818,7 +18818,7 @@
       </p:sp>
       <p:pic>
         <p:nvPicPr>
-          <p:cNvPr id="6" name="삽화:흐름_전체.svg" descr="illust_1561838170229044568_1791735769.png"/>
+          <p:cNvPr id="6" name="삽화:흐름_전체.svg" descr="illust_4927167558605323387_1791735769.png"/>
           <p:cNvPicPr>
             <a:picLocks noChangeAspect="1"/>
           </p:cNvPicPr>
@@ -19686,7 +19686,7 @@
       </p:sp>
       <p:pic>
         <p:nvPicPr>
-          <p:cNvPr id="6" name="삽화:이벤트.svg" descr="illust_6994946918542227029_1791735769.png"/>
+          <p:cNvPr id="6" name="삽화:이벤트.svg" descr="illust_4676556247940309150_1791735769.png"/>
           <p:cNvPicPr>
             <a:picLocks noChangeAspect="1"/>
           </p:cNvPicPr>
@@ -20176,7 +20176,7 @@
       </p:sp>
       <p:pic>
         <p:nvPicPr>
-          <p:cNvPr id="6" name="삽화:작업종류.svg" descr="illust_8072834001819049153_1791735769.png"/>
+          <p:cNvPr id="6" name="삽화:작업종류.svg" descr="illust_7882514182111968652_1791735769.png"/>
           <p:cNvPicPr>
             <a:picLocks noChangeAspect="1"/>
           </p:cNvPicPr>
@@ -20834,7 +20834,7 @@
       </p:sp>
       <p:pic>
         <p:nvPicPr>
-          <p:cNvPr id="6" name="삽화:게이트웨이.svg" descr="illust_5454739206050703149_1791735769.png"/>
+          <p:cNvPr id="6" name="삽화:게이트웨이.svg" descr="illust_6639511322572519361_1791735769.png"/>
           <p:cNvPicPr>
             <a:picLocks noChangeAspect="1"/>
           </p:cNvPicPr>
@@ -22341,7 +22341,7 @@
       </p:sp>
       <p:pic>
         <p:nvPicPr>
-          <p:cNvPr id="6" name="삽화:풀과레인.svg" descr="illust_6979021912150766013_1791735769.png"/>
+          <p:cNvPr id="6" name="삽화:풀과레인.svg" descr="illust_8133284556254100358_1791735769.png"/>
           <p:cNvPicPr>
             <a:picLocks noChangeAspect="1"/>
           </p:cNvPicPr>
@@ -22957,7 +22957,7 @@
       </p:sp>
       <p:pic>
         <p:nvPicPr>
-          <p:cNvPr id="6" name="삽화:메시지흐름.svg" descr="illust_5712395006683107682_1791735769.png"/>
+          <p:cNvPr id="6" name="삽화:메시지흐름.svg" descr="illust_5829914421607573636_1791735769.png"/>
           <p:cNvPicPr>
             <a:picLocks noChangeAspect="1"/>
           </p:cNvPicPr>
@@ -24187,7 +24187,7 @@
       </p:sp>
       <p:pic>
         <p:nvPicPr>
-          <p:cNvPr id="6" name="삽화:경계타이머.svg" descr="illust_4806394438165259129_1791735769.png"/>
+          <p:cNvPr id="6" name="삽화:경계타이머.svg" descr="illust_786407690344094465_1791735769.png"/>
           <p:cNvPicPr>
             <a:picLocks noChangeAspect="1"/>
           </p:cNvPicPr>
@@ -24677,7 +24677,7 @@
       </p:sp>
       <p:pic>
         <p:nvPicPr>
-          <p:cNvPr id="6" name="삽화:승인자리.svg" descr="illust_2350848958251888599_1791735769.png"/>
+          <p:cNvPr id="6" name="삽화:승인자리.svg" descr="illust_5824057040374741174_1791735769.png"/>
           <p:cNvPicPr>
             <a:picLocks noChangeAspect="1"/>
           </p:cNvPicPr>
@@ -28362,7 +28362,7 @@
       </p:sp>
       <p:pic>
         <p:nvPicPr>
-          <p:cNvPr id="6" name="삽화:정의와인스턴스.svg" descr="illust_5079015804558588547_1791735769.png"/>
+          <p:cNvPr id="6" name="삽화:정의와인스턴스.svg" descr="illust_6639299880133315845_1791735769.png"/>
           <p:cNvPicPr>
             <a:picLocks noChangeAspect="1"/>
           </p:cNvPicPr>
@@ -28873,7 +28873,7 @@
       </p:sp>
       <p:pic>
         <p:nvPicPr>
-          <p:cNvPr id="6" name="삽화:흐름_토큰_승인대기.svg" descr="illust_2683055577022984527_1791735769.png"/>
+          <p:cNvPr id="6" name="삽화:흐름_토큰_승인대기.svg" descr="illust_3307178612497293924_1791735769.png"/>
           <p:cNvPicPr>
             <a:picLocks noChangeAspect="1"/>
           </p:cNvPicPr>
@@ -30269,7 +30269,7 @@
       </p:sp>
       <p:pic>
         <p:nvPicPr>
-          <p:cNvPr id="6" name="삽화:흐름_토큰_둘.svg" descr="illust_8666309684014792055_1791735769.png"/>
+          <p:cNvPr id="6" name="삽화:흐름_토큰_둘.svg" descr="illust_2008544079267538719_1791735769.png"/>
           <p:cNvPicPr>
             <a:picLocks noChangeAspect="1"/>
           </p:cNvPicPr>
@@ -39697,7 +39697,7 @@
       </p:sp>
       <p:pic>
         <p:nvPicPr>
-          <p:cNvPr id="6" name="삽화:남은일_추천뒤.svg" descr="illust_8808568101484667171_1791735769.png"/>
+          <p:cNvPr id="6" name="삽화:남은일_추천뒤.svg" descr="illust_2704387792315771279_1791735769.png"/>
           <p:cNvPicPr>
             <a:picLocks noChangeAspect="1"/>
           </p:cNvPicPr>
@@ -49298,7 +49298,7 @@
                 <a:ea typeface="맑은 고딕"/>
                 <a:cs typeface="맑은 고딕"/>
               </a:rPr>
-              <a:t>배운 내용을 바탕으로 정답을 맞춰보세요.</a:t>
+              <a:t>배운 내용을 바탕으로 정답을 맞혀 보세요.</a:t>
             </a:r>
           </a:p>
         </p:txBody>
@@ -54037,7 +54037,7 @@
       </p:sp>
       <p:pic>
         <p:nvPicPr>
-          <p:cNvPr id="6" name="삽화:남은일_종단.svg" descr="illust_7064735421616271760_1791735769.png"/>
+          <p:cNvPr id="6" name="삽화:남은일_종단.svg" descr="illust_6232556825311311444_1791735769.png"/>
           <p:cNvPicPr>
             <a:picLocks noChangeAspect="1"/>
           </p:cNvPicPr>

--- a/docs/교재/실전반/06일차/실전반_06일차.pptx
+++ b/docs/교재/실전반/06일차/실전반_06일차.pptx
@@ -917,7 +917,7 @@
           <a:lstStyle/>
           <a:p>
             <a:r>
-              <a:t>다섯 단계에서 실제로 하는 일을 이 과정의 활동과 짝지었습니다. 분석에서는 업무의 시작 조건과 책임자와 완료 조건을 가려내고, 설계에서는 그것을 그림으로 그립니다. 실행에서는 그림을 등록하고 배포해 실제 경보에서 수행되게 하고, 모니터링에서는 처리 건을 지켜봅니다. 개선에서는 고친 흐름을 다시 등록합니다.</a:t>
+              <a:t>다섯 단계에서 하는 일을 쿨러 사건의 예와 나란히 놓았습니다. 분석에서는 업무의 시작 조건과 책임자와 완료 조건을 가려내며, 쿨러 사건에서는 시작 조건이 쿨러 성능 저하 경보이고 승인의 책임자가 운전원입니다. 설계에서 정한 순서대로 실행에서는 경보 한 건에 처리 건 하나가 열렸고, 모니터링에서는 운전원 승인의 대기와 재관측의 결과를 지켜봅니다. 개선에서 고친 흐름은 다음 경보의 처리 건부터 쓰입니다.</a:t>
             </a:r>
           </a:p>
         </p:txBody>
@@ -3087,7 +3087,7 @@
           <a:lstStyle/>
           <a:p>
             <a:r>
-              <a:t>이 실습에서는 BPMN 그림을 그리는 도구인 bpmn.io의 기본 사용법을 익힙니다. 앞에서 읽은 이벤트, 작업, 게이트웨이를 그림에 놓고 시퀀스 흐름으로 이은 뒤, 놓은 요소를 고치고 속성을 확인합니다. 그린 그림은 .bpmn 파일로 저장하고 다시 불러옵니다. 이어지는 실습에서 그리는 프로세스도 이 형식의 파일로 남습니다.</a:t>
+              <a:t>이 실습에서는 BPMN 그림을 그리는 도구인 bpmn.io로 세 가지를 익힙니다. 앞에서 읽은 이벤트, 작업, 게이트웨이를 그림에 놓고 시퀀스 흐름으로 잇는 것, 놓은 요소의 속성을 읽는 것, 그림을 .bpmn 파일로 남기는 것입니다. 끝나면 직접 그린 그림이 담긴 .bpmn 파일 하나가 만들어지고, 다시 열면 같은 그림이 나옵니다. 이어지는 실습에서 그리는 프로세스도 이 형식의 파일로 남습니다.</a:t>
             </a:r>
           </a:p>
         </p:txBody>
@@ -12681,7 +12681,7 @@
       </p:sp>
       <p:pic>
         <p:nvPicPr>
-          <p:cNvPr id="6" name="삽화:BPM주기.svg" descr="illust_1805514910391798302_1791735769.png"/>
+          <p:cNvPr id="6" name="삽화:BPM주기.svg" descr="illust_6557738836683088017_1791735769.png"/>
           <p:cNvPicPr>
             <a:picLocks noChangeAspect="1"/>
           </p:cNvPicPr>
@@ -13117,7 +13117,7 @@
                 <a:ea typeface="맑은 고딕"/>
                 <a:cs typeface="맑은 고딕"/>
               </a:rPr>
-              <a:t>다섯 단계의 일은 이 과정에서 프로세스를 그리고, 등록해 실행하고, 처리 건을 지켜보는 활동에 대응한다.</a:t>
+              <a:t>쿨러 사건에 대어 보면 분석과 설계는 프로세스의 정의를 내고, 실행과 모니터링은 처리 건의 기록을 남긴다.</a:t>
             </a:r>
           </a:p>
         </p:txBody>
@@ -13333,7 +13333,7 @@
                 <a:ea typeface="맑은 고딕"/>
                 <a:cs typeface="맑은 고딕"/>
               </a:rPr>
-              <a:t>이 과정에서</a:t>
+              <a:t>쿨러 사건에서</a:t>
             </a:r>
           </a:p>
         </p:txBody>
@@ -13481,7 +13481,25 @@
                 <a:ea typeface="맑은 고딕"/>
                 <a:cs typeface="맑은 고딕"/>
               </a:rPr>
-              <a:t>경보 대응 업무의 정리</a:t>
+              <a:t>쿨러 성능 저하 경보가</a:t>
+            </a:r>
+          </a:p>
+          <a:p>
+            <a:pPr algn="l">
+              <a:lnSpc>
+                <a:spcPct val="110000"/>
+              </a:lnSpc>
+            </a:pPr>
+            <a:r>
+              <a:rPr sz="1250" b="1">
+                <a:solidFill>
+                  <a:srgbClr val="556175"/>
+                </a:solidFill>
+                <a:latin typeface="맑은 고딕"/>
+                <a:ea typeface="맑은 고딕"/>
+                <a:cs typeface="맑은 고딕"/>
+              </a:rPr>
+              <a:t>열고 운전원이 승인한다</a:t>
             </a:r>
           </a:p>
         </p:txBody>
@@ -13629,7 +13647,25 @@
                 <a:ea typeface="맑은 고딕"/>
                 <a:cs typeface="맑은 고딕"/>
               </a:rPr>
-              <a:t>긴급 대응 프로세스 그리기</a:t>
+              <a:t>경보, 추천, 승인, 명령,</a:t>
+            </a:r>
+          </a:p>
+          <a:p>
+            <a:pPr algn="l">
+              <a:lnSpc>
+                <a:spcPct val="110000"/>
+              </a:lnSpc>
+            </a:pPr>
+            <a:r>
+              <a:rPr sz="1250" b="1">
+                <a:solidFill>
+                  <a:srgbClr val="556175"/>
+                </a:solidFill>
+                <a:latin typeface="맑은 고딕"/>
+                <a:ea typeface="맑은 고딕"/>
+                <a:cs typeface="맑은 고딕"/>
+              </a:rPr>
+              <a:t>재관측, 보고의 순서</a:t>
             </a:r>
           </a:p>
         </p:txBody>
@@ -13777,7 +13813,25 @@
                 <a:ea typeface="맑은 고딕"/>
                 <a:cs typeface="맑은 고딕"/>
               </a:rPr>
-              <a:t>등록과 배포</a:t>
+              <a:t>경보 한 건에</a:t>
+            </a:r>
+          </a:p>
+          <a:p>
+            <a:pPr algn="l">
+              <a:lnSpc>
+                <a:spcPct val="110000"/>
+              </a:lnSpc>
+            </a:pPr>
+            <a:r>
+              <a:rPr sz="1250" b="1">
+                <a:solidFill>
+                  <a:srgbClr val="556175"/>
+                </a:solidFill>
+                <a:latin typeface="맑은 고딕"/>
+                <a:ea typeface="맑은 고딕"/>
+                <a:cs typeface="맑은 고딕"/>
+              </a:rPr>
+              <a:t>처리 건 하나가 열렸다</a:t>
             </a:r>
           </a:p>
         </p:txBody>
@@ -13925,7 +13979,25 @@
                 <a:ea typeface="맑은 고딕"/>
                 <a:cs typeface="맑은 고딕"/>
               </a:rPr>
-              <a:t>처리 건 추적</a:t>
+              <a:t>운전원 승인의 대기와</a:t>
+            </a:r>
+          </a:p>
+          <a:p>
+            <a:pPr algn="l">
+              <a:lnSpc>
+                <a:spcPct val="110000"/>
+              </a:lnSpc>
+            </a:pPr>
+            <a:r>
+              <a:rPr sz="1250" b="1">
+                <a:solidFill>
+                  <a:srgbClr val="556175"/>
+                </a:solidFill>
+                <a:latin typeface="맑은 고딕"/>
+                <a:ea typeface="맑은 고딕"/>
+                <a:cs typeface="맑은 고딕"/>
+              </a:rPr>
+              <a:t>재관측의 결과</a:t>
             </a:r>
           </a:p>
         </p:txBody>
@@ -14073,7 +14145,25 @@
                 <a:ea typeface="맑은 고딕"/>
                 <a:cs typeface="맑은 고딕"/>
               </a:rPr>
-              <a:t>새 판본의 등록</a:t>
+              <a:t>고친 흐름은 다음 경보의</a:t>
+            </a:r>
+          </a:p>
+          <a:p>
+            <a:pPr algn="l">
+              <a:lnSpc>
+                <a:spcPct val="110000"/>
+              </a:lnSpc>
+            </a:pPr>
+            <a:r>
+              <a:rPr sz="1250" b="1">
+                <a:solidFill>
+                  <a:srgbClr val="1A6FC4"/>
+                </a:solidFill>
+                <a:latin typeface="맑은 고딕"/>
+                <a:ea typeface="맑은 고딕"/>
+                <a:cs typeface="맑은 고딕"/>
+              </a:rPr>
+              <a:t>처리 건부터 쓰인다</a:t>
             </a:r>
           </a:p>
         </p:txBody>
@@ -14252,7 +14342,7 @@
       </p:sp>
       <p:pic>
         <p:nvPicPr>
-          <p:cNvPr id="6" name="삽화:현재와목표.svg" descr="illust_5001280623791617068_1791735769.png"/>
+          <p:cNvPr id="6" name="삽화:현재와목표.svg" descr="illust_6807607317263406718_1791735769.png"/>
           <p:cNvPicPr>
             <a:picLocks noChangeAspect="1"/>
           </p:cNvPicPr>
@@ -18181,7 +18271,7 @@
       </p:sp>
       <p:pic>
         <p:nvPicPr>
-          <p:cNvPr id="6" name="삽화:요소묶음.svg" descr="illust_7175754200771628015_1791735769.png"/>
+          <p:cNvPr id="6" name="삽화:요소묶음.svg" descr="illust_4301129470451947197_1791735769.png"/>
           <p:cNvPicPr>
             <a:picLocks noChangeAspect="1"/>
           </p:cNvPicPr>
@@ -18818,7 +18908,7 @@
       </p:sp>
       <p:pic>
         <p:nvPicPr>
-          <p:cNvPr id="6" name="삽화:흐름_전체.svg" descr="illust_4927167558605323387_1791735769.png"/>
+          <p:cNvPr id="6" name="삽화:흐름_전체.svg" descr="illust_7146582762197504657_1791735769.png"/>
           <p:cNvPicPr>
             <a:picLocks noChangeAspect="1"/>
           </p:cNvPicPr>
@@ -19686,7 +19776,7 @@
       </p:sp>
       <p:pic>
         <p:nvPicPr>
-          <p:cNvPr id="6" name="삽화:이벤트.svg" descr="illust_4676556247940309150_1791735769.png"/>
+          <p:cNvPr id="6" name="삽화:이벤트.svg" descr="illust_1346712163312452458_1791735769.png"/>
           <p:cNvPicPr>
             <a:picLocks noChangeAspect="1"/>
           </p:cNvPicPr>
@@ -20176,7 +20266,7 @@
       </p:sp>
       <p:pic>
         <p:nvPicPr>
-          <p:cNvPr id="6" name="삽화:작업종류.svg" descr="illust_7882514182111968652_1791735769.png"/>
+          <p:cNvPr id="6" name="삽화:작업종류.svg" descr="illust_1923726032984393030_1791735769.png"/>
           <p:cNvPicPr>
             <a:picLocks noChangeAspect="1"/>
           </p:cNvPicPr>
@@ -20834,7 +20924,7 @@
       </p:sp>
       <p:pic>
         <p:nvPicPr>
-          <p:cNvPr id="6" name="삽화:게이트웨이.svg" descr="illust_6639511322572519361_1791735769.png"/>
+          <p:cNvPr id="6" name="삽화:게이트웨이.svg" descr="illust_7503503377940083888_1791735769.png"/>
           <p:cNvPicPr>
             <a:picLocks noChangeAspect="1"/>
           </p:cNvPicPr>
@@ -22341,7 +22431,7 @@
       </p:sp>
       <p:pic>
         <p:nvPicPr>
-          <p:cNvPr id="6" name="삽화:풀과레인.svg" descr="illust_8133284556254100358_1791735769.png"/>
+          <p:cNvPr id="6" name="삽화:풀과레인.svg" descr="illust_2535545308937139517_1791735769.png"/>
           <p:cNvPicPr>
             <a:picLocks noChangeAspect="1"/>
           </p:cNvPicPr>
@@ -22957,7 +23047,7 @@
       </p:sp>
       <p:pic>
         <p:nvPicPr>
-          <p:cNvPr id="6" name="삽화:메시지흐름.svg" descr="illust_5829914421607573636_1791735769.png"/>
+          <p:cNvPr id="6" name="삽화:메시지흐름.svg" descr="illust_7916547393376552944_1791735769.png"/>
           <p:cNvPicPr>
             <a:picLocks noChangeAspect="1"/>
           </p:cNvPicPr>
@@ -24187,7 +24277,7 @@
       </p:sp>
       <p:pic>
         <p:nvPicPr>
-          <p:cNvPr id="6" name="삽화:경계타이머.svg" descr="illust_786407690344094465_1791735769.png"/>
+          <p:cNvPr id="6" name="삽화:경계타이머.svg" descr="illust_6297785244643727303_1791735769.png"/>
           <p:cNvPicPr>
             <a:picLocks noChangeAspect="1"/>
           </p:cNvPicPr>
@@ -24677,7 +24767,7 @@
       </p:sp>
       <p:pic>
         <p:nvPicPr>
-          <p:cNvPr id="6" name="삽화:승인자리.svg" descr="illust_5824057040374741174_1791735769.png"/>
+          <p:cNvPr id="6" name="삽화:승인자리.svg" descr="illust_299784276568669567_1791735769.png"/>
           <p:cNvPicPr>
             <a:picLocks noChangeAspect="1"/>
           </p:cNvPicPr>
@@ -28362,7 +28452,7 @@
       </p:sp>
       <p:pic>
         <p:nvPicPr>
-          <p:cNvPr id="6" name="삽화:정의와인스턴스.svg" descr="illust_6639299880133315845_1791735769.png"/>
+          <p:cNvPr id="6" name="삽화:정의와인스턴스.svg" descr="illust_2497052331966441085_1791735769.png"/>
           <p:cNvPicPr>
             <a:picLocks noChangeAspect="1"/>
           </p:cNvPicPr>
@@ -28873,7 +28963,7 @@
       </p:sp>
       <p:pic>
         <p:nvPicPr>
-          <p:cNvPr id="6" name="삽화:흐름_토큰_승인대기.svg" descr="illust_3307178612497293924_1791735769.png"/>
+          <p:cNvPr id="6" name="삽화:흐름_토큰_승인대기.svg" descr="illust_6857599391990057460_1791735769.png"/>
           <p:cNvPicPr>
             <a:picLocks noChangeAspect="1"/>
           </p:cNvPicPr>
@@ -30269,7 +30359,7 @@
       </p:sp>
       <p:pic>
         <p:nvPicPr>
-          <p:cNvPr id="6" name="삽화:흐름_토큰_둘.svg" descr="illust_2008544079267538719_1791735769.png"/>
+          <p:cNvPr id="6" name="삽화:흐름_토큰_둘.svg" descr="illust_3916765487088136840_1791735769.png"/>
           <p:cNvPicPr>
             <a:picLocks noChangeAspect="1"/>
           </p:cNvPicPr>
@@ -38062,7 +38152,7 @@
                 <a:ea typeface="맑은 고딕"/>
                 <a:cs typeface="맑은 고딕"/>
               </a:rPr>
-              <a:t>bpmn.io에서 요소를 배치하고 연결해 .bpmn 파일로 저장하고 불러온다</a:t>
+              <a:t>bpmn.io에서 요소를 놓고 이어 본 뒤 그림을 .bpmn 파일로 남긴다</a:t>
             </a:r>
           </a:p>
         </p:txBody>
@@ -38127,7 +38217,7 @@
                 <a:ea typeface="맑은 고딕"/>
                 <a:cs typeface="맑은 고딕"/>
               </a:rPr>
-              <a:t>실습에서 다루는 기능과 만들어지는 파일</a:t>
+              <a:t>실습에서 익히는 것과 만들어지는 파일</a:t>
             </a:r>
           </a:p>
         </p:txBody>
@@ -38166,7 +38256,7 @@
                 <a:ea typeface="맑은 고딕"/>
                 <a:cs typeface="맑은 고딕"/>
               </a:rPr>
-              <a:t>bpmn.io에서 요소를 놓고 이어 만든 그림은 .bpmn 파일 하나로 저장되고, 그 파일을 불러오면 같은 그림이 다시 열린다.</a:t>
+              <a:t>요소를 놓고 잇기, 속성 읽기, 파일로 남기기를 익히면 다시 열어도 같은 그림이 나오는 .bpmn 파일 하나가 만들어진다.</a:t>
             </a:r>
           </a:p>
         </p:txBody>
@@ -38247,19 +38337,21 @@
         </p:nvSpPr>
         <p:spPr>
           <a:xfrm>
-            <a:off x="548640" y="2626423"/>
-            <a:ext cx="1911644" cy="2729864"/>
+            <a:off x="548640" y="2523172"/>
+            <a:ext cx="2567863" cy="2936366"/>
           </a:xfrm>
           <a:prstGeom prst="roundRect">
             <a:avLst>
-              <a:gd name="adj" fmla="val 5000"/>
+              <a:gd name="adj" fmla="val 4000"/>
             </a:avLst>
           </a:prstGeom>
           <a:solidFill>
-            <a:srgbClr val="F3F6F9"/>
+            <a:srgbClr val="FFFFFF"/>
           </a:solidFill>
-          <a:ln>
-            <a:noFill/>
+          <a:ln w="15875">
+            <a:solidFill>
+              <a:srgbClr val="D3D9E1"/>
+            </a:solidFill>
           </a:ln>
         </p:spPr>
         <p:txBody>
@@ -38278,14 +38370,14 @@
         </p:nvSpPr>
         <p:spPr>
           <a:xfrm>
-            <a:off x="1138702" y="2809303"/>
+            <a:off x="777240" y="2724340"/>
             <a:ext cx="731520" cy="731520"/>
           </a:xfrm>
           <a:prstGeom prst="ellipse">
             <a:avLst/>
           </a:prstGeom>
           <a:solidFill>
-            <a:srgbClr val="FFFFFF"/>
+            <a:srgbClr val="E7F3FD"/>
           </a:solidFill>
           <a:ln>
             <a:noFill/>
@@ -38315,7 +38407,7 @@
         </p:blipFill>
         <p:spPr>
           <a:xfrm>
-            <a:off x="1292321" y="2962922"/>
+            <a:off x="930859" y="2877959"/>
             <a:ext cx="424281" cy="424281"/>
           </a:xfrm>
           <a:prstGeom prst="rect">
@@ -38331,8 +38423,8 @@
         </p:nvSpPr>
         <p:spPr>
           <a:xfrm>
-            <a:off x="621792" y="3613975"/>
-            <a:ext cx="1765340" cy="1669160"/>
+            <a:off x="713232" y="3547300"/>
+            <a:ext cx="2238679" cy="1409318"/>
           </a:xfrm>
           <a:prstGeom prst="rect">
             <a:avLst/>
@@ -38343,7 +38435,7 @@
           <a:bodyPr wrap="square" anchor="t"/>
           <a:lstStyle/>
           <a:p>
-            <a:pPr algn="ctr">
+            <a:pPr algn="l">
               <a:lnSpc>
                 <a:spcPct val="110000"/>
               </a:lnSpc>
@@ -38352,7 +38444,7 @@
               </a:spcAft>
             </a:pPr>
             <a:r>
-              <a:rPr sz="1550" b="1">
+              <a:rPr sz="1800" b="1">
                 <a:solidFill>
                   <a:srgbClr val="13294B"/>
                 </a:solidFill>
@@ -38360,11 +38452,11 @@
                 <a:ea typeface="맑은 고딕"/>
                 <a:cs typeface="맑은 고딕"/>
               </a:rPr>
-              <a:t>배치</a:t>
-            </a:r>
-          </a:p>
-          <a:p>
-            <a:pPr algn="ctr">
+              <a:t>요소를 놓고 잇는다</a:t>
+            </a:r>
+          </a:p>
+          <a:p>
+            <a:pPr algn="l">
               <a:lnSpc>
                 <a:spcPct val="110000"/>
               </a:lnSpc>
@@ -38373,7 +38465,7 @@
               </a:spcAft>
             </a:pPr>
             <a:r>
-              <a:rPr sz="1250" b="0">
+              <a:rPr sz="1350" b="0">
                 <a:solidFill>
                   <a:srgbClr val="1F2A3A"/>
                 </a:solidFill>
@@ -38381,69 +38473,29 @@
                 <a:ea typeface="맑은 고딕"/>
                 <a:cs typeface="맑은 고딕"/>
               </a:rPr>
-              <a:t>이벤트, 작업,</a:t>
-            </a:r>
-          </a:p>
-          <a:p>
-            <a:pPr algn="ctr">
-              <a:lnSpc>
-                <a:spcPct val="110000"/>
-              </a:lnSpc>
-              <a:spcAft>
-                <a:spcPts val="400"/>
-              </a:spcAft>
-            </a:pPr>
-            <a:r>
-              <a:rPr sz="1250" b="0">
-                <a:solidFill>
-                  <a:srgbClr val="1F2A3A"/>
-                </a:solidFill>
-                <a:latin typeface="맑은 고딕"/>
-                <a:ea typeface="맑은 고딕"/>
-                <a:cs typeface="맑은 고딕"/>
-              </a:rPr>
-              <a:t>게이트웨이를</a:t>
-            </a:r>
-          </a:p>
-          <a:p>
-            <a:pPr algn="ctr">
-              <a:lnSpc>
-                <a:spcPct val="110000"/>
-              </a:lnSpc>
-              <a:spcAft>
-                <a:spcPts val="400"/>
-              </a:spcAft>
-            </a:pPr>
-            <a:r>
-              <a:rPr sz="1250" b="0">
-                <a:solidFill>
-                  <a:srgbClr val="1F2A3A"/>
-                </a:solidFill>
-                <a:latin typeface="맑은 고딕"/>
-                <a:ea typeface="맑은 고딕"/>
-                <a:cs typeface="맑은 고딕"/>
-              </a:rPr>
-              <a:t>그림에 놓는다</a:t>
-            </a:r>
-          </a:p>
-        </p:txBody>
-      </p:sp>
-      <p:sp>
-        <p:nvSpPr>
-          <p:cNvPr id="10" name="Right Arrow 9"/>
+              <a:t>이벤트, 작업, 게이트웨이를 그림에 놓고 시퀀스 흐름으로 잇는다</a:t>
+            </a:r>
+          </a:p>
+        </p:txBody>
+      </p:sp>
+      <p:sp>
+        <p:nvSpPr>
+          <p:cNvPr id="10" name="Rounded Rectangle 9"/>
           <p:cNvSpPr/>
           <p:nvPr/>
         </p:nvSpPr>
         <p:spPr>
           <a:xfrm>
-            <a:off x="2524292" y="3854196"/>
-            <a:ext cx="256031" cy="274320"/>
-          </a:xfrm>
-          <a:prstGeom prst="rightArrow">
-            <a:avLst/>
+            <a:off x="777240" y="5029771"/>
+            <a:ext cx="822960" cy="292608"/>
+          </a:xfrm>
+          <a:prstGeom prst="roundRect">
+            <a:avLst>
+              <a:gd name="adj" fmla="val 50000"/>
+            </a:avLst>
           </a:prstGeom>
           <a:solidFill>
-            <a:srgbClr val="13294B"/>
+            <a:srgbClr val="D3D9E1"/>
           </a:solidFill>
           <a:ln>
             <a:noFill/>
@@ -38459,22 +38511,92 @@
       </p:sp>
       <p:sp>
         <p:nvSpPr>
-          <p:cNvPr id="11" name="Rounded Rectangle 10"/>
+          <p:cNvPr id="11" name="TextBox 10"/>
+          <p:cNvSpPr txBox="1"/>
+          <p:nvPr/>
+        </p:nvSpPr>
+        <p:spPr>
+          <a:xfrm>
+            <a:off x="777240" y="5029771"/>
+            <a:ext cx="822960" cy="292608"/>
+          </a:xfrm>
+          <a:prstGeom prst="rect">
+            <a:avLst/>
+          </a:prstGeom>
+          <a:noFill/>
+        </p:spPr>
+        <p:txBody>
+          <a:bodyPr wrap="square" anchor="ctr"/>
+          <a:lstStyle/>
+          <a:p>
+            <a:pPr algn="ctr">
+              <a:lnSpc>
+                <a:spcPct val="110000"/>
+              </a:lnSpc>
+            </a:pPr>
+            <a:r>
+              <a:rPr sz="1200" b="1">
+                <a:solidFill>
+                  <a:srgbClr val="13294B"/>
+                </a:solidFill>
+                <a:latin typeface="맑은 고딕"/>
+                <a:ea typeface="맑은 고딕"/>
+                <a:cs typeface="맑은 고딕"/>
+              </a:rPr>
+              <a:t>그리기</a:t>
+            </a:r>
+          </a:p>
+        </p:txBody>
+      </p:sp>
+      <p:sp>
+        <p:nvSpPr>
+          <p:cNvPr id="12" name="Rounded Rectangle 11"/>
           <p:cNvSpPr/>
           <p:nvPr/>
         </p:nvSpPr>
         <p:spPr>
           <a:xfrm>
-            <a:off x="2844332" y="2626423"/>
-            <a:ext cx="1911644" cy="2729864"/>
+            <a:off x="3390823" y="2523172"/>
+            <a:ext cx="2567863" cy="2936366"/>
           </a:xfrm>
           <a:prstGeom prst="roundRect">
             <a:avLst>
-              <a:gd name="adj" fmla="val 5000"/>
+              <a:gd name="adj" fmla="val 4000"/>
             </a:avLst>
           </a:prstGeom>
           <a:solidFill>
-            <a:srgbClr val="F3F6F9"/>
+            <a:srgbClr val="FFFFFF"/>
+          </a:solidFill>
+          <a:ln w="15875">
+            <a:solidFill>
+              <a:srgbClr val="D3D9E1"/>
+            </a:solidFill>
+          </a:ln>
+        </p:spPr>
+        <p:txBody>
+          <a:bodyPr rtlCol="0" anchor="ctr"/>
+          <a:lstStyle/>
+          <a:p>
+            <a:pPr algn="ctr"/>
+          </a:p>
+        </p:txBody>
+      </p:sp>
+      <p:sp>
+        <p:nvSpPr>
+          <p:cNvPr id="13" name="Oval 12"/>
+          <p:cNvSpPr/>
+          <p:nvPr/>
+        </p:nvSpPr>
+        <p:spPr>
+          <a:xfrm>
+            <a:off x="3619423" y="2724340"/>
+            <a:ext cx="731520" cy="731520"/>
+          </a:xfrm>
+          <a:prstGeom prst="ellipse">
+            <a:avLst/>
+          </a:prstGeom>
+          <a:solidFill>
+            <a:srgbClr val="E7F3FD"/>
           </a:solidFill>
           <a:ln>
             <a:noFill/>
@@ -38488,38 +38610,9 @@
           </a:p>
         </p:txBody>
       </p:sp>
-      <p:sp>
-        <p:nvSpPr>
-          <p:cNvPr id="12" name="Oval 11"/>
-          <p:cNvSpPr/>
-          <p:nvPr/>
-        </p:nvSpPr>
-        <p:spPr>
-          <a:xfrm>
-            <a:off x="3434394" y="2809303"/>
-            <a:ext cx="731520" cy="731520"/>
-          </a:xfrm>
-          <a:prstGeom prst="ellipse">
-            <a:avLst/>
-          </a:prstGeom>
-          <a:solidFill>
-            <a:srgbClr val="FFFFFF"/>
-          </a:solidFill>
-          <a:ln>
-            <a:noFill/>
-          </a:ln>
-        </p:spPr>
-        <p:txBody>
-          <a:bodyPr rtlCol="0" anchor="ctr"/>
-          <a:lstStyle/>
-          <a:p>
-            <a:pPr algn="ctr"/>
-          </a:p>
-        </p:txBody>
-      </p:sp>
       <p:pic>
         <p:nvPicPr>
-          <p:cNvPr id="13" name="아이콘:line" descr="line_13294B_1.6.png"/>
+          <p:cNvPr id="14" name="아이콘:forms" descr="forms_13294B_1.6.png"/>
           <p:cNvPicPr>
             <a:picLocks noChangeAspect="1"/>
           </p:cNvPicPr>
@@ -38533,7 +38626,7 @@
         </p:blipFill>
         <p:spPr>
           <a:xfrm>
-            <a:off x="3588014" y="2962922"/>
+            <a:off x="3773043" y="2877959"/>
             <a:ext cx="424281" cy="424281"/>
           </a:xfrm>
           <a:prstGeom prst="rect">
@@ -38543,14 +38636,14 @@
       </p:pic>
       <p:sp>
         <p:nvSpPr>
-          <p:cNvPr id="14" name="TextBox 13"/>
-          <p:cNvSpPr txBox="1"/>
-          <p:nvPr/>
-        </p:nvSpPr>
-        <p:spPr>
-          <a:xfrm>
-            <a:off x="2917484" y="3613975"/>
-            <a:ext cx="1765340" cy="1669160"/>
+          <p:cNvPr id="15" name="TextBox 14"/>
+          <p:cNvSpPr txBox="1"/>
+          <p:nvPr/>
+        </p:nvSpPr>
+        <p:spPr>
+          <a:xfrm>
+            <a:off x="3555415" y="3547300"/>
+            <a:ext cx="2238679" cy="1409318"/>
           </a:xfrm>
           <a:prstGeom prst="rect">
             <a:avLst/>
@@ -38561,7 +38654,7 @@
           <a:bodyPr wrap="square" anchor="t"/>
           <a:lstStyle/>
           <a:p>
-            <a:pPr algn="ctr">
+            <a:pPr algn="l">
               <a:lnSpc>
                 <a:spcPct val="110000"/>
               </a:lnSpc>
@@ -38570,7 +38663,7 @@
               </a:spcAft>
             </a:pPr>
             <a:r>
-              <a:rPr sz="1550" b="1">
+              <a:rPr sz="1800" b="1">
                 <a:solidFill>
                   <a:srgbClr val="13294B"/>
                 </a:solidFill>
@@ -38578,11 +38671,11 @@
                 <a:ea typeface="맑은 고딕"/>
                 <a:cs typeface="맑은 고딕"/>
               </a:rPr>
-              <a:t>연결</a:t>
-            </a:r>
-          </a:p>
-          <a:p>
-            <a:pPr algn="ctr">
+              <a:t>속성을 읽는다</a:t>
+            </a:r>
+          </a:p>
+          <a:p>
+            <a:pPr algn="l">
               <a:lnSpc>
                 <a:spcPct val="110000"/>
               </a:lnSpc>
@@ -38591,7 +38684,7 @@
               </a:spcAft>
             </a:pPr>
             <a:r>
-              <a:rPr sz="1250" b="0">
+              <a:rPr sz="1350" b="0">
                 <a:solidFill>
                   <a:srgbClr val="1F2A3A"/>
                 </a:solidFill>
@@ -38599,69 +38692,29 @@
                 <a:ea typeface="맑은 고딕"/>
                 <a:cs typeface="맑은 고딕"/>
               </a:rPr>
-              <a:t>놓은 요소를</a:t>
-            </a:r>
-          </a:p>
-          <a:p>
-            <a:pPr algn="ctr">
-              <a:lnSpc>
-                <a:spcPct val="110000"/>
-              </a:lnSpc>
-              <a:spcAft>
-                <a:spcPts val="400"/>
-              </a:spcAft>
-            </a:pPr>
-            <a:r>
-              <a:rPr sz="1250" b="0">
-                <a:solidFill>
-                  <a:srgbClr val="1F2A3A"/>
-                </a:solidFill>
-                <a:latin typeface="맑은 고딕"/>
-                <a:ea typeface="맑은 고딕"/>
-                <a:cs typeface="맑은 고딕"/>
-              </a:rPr>
-              <a:t>시퀀스 흐름으로</a:t>
-            </a:r>
-          </a:p>
-          <a:p>
-            <a:pPr algn="ctr">
-              <a:lnSpc>
-                <a:spcPct val="110000"/>
-              </a:lnSpc>
-              <a:spcAft>
-                <a:spcPts val="400"/>
-              </a:spcAft>
-            </a:pPr>
-            <a:r>
-              <a:rPr sz="1250" b="0">
-                <a:solidFill>
-                  <a:srgbClr val="1F2A3A"/>
-                </a:solidFill>
-                <a:latin typeface="맑은 고딕"/>
-                <a:ea typeface="맑은 고딕"/>
-                <a:cs typeface="맑은 고딕"/>
-              </a:rPr>
-              <a:t>잇는다</a:t>
-            </a:r>
-          </a:p>
-        </p:txBody>
-      </p:sp>
-      <p:sp>
-        <p:nvSpPr>
-          <p:cNvPr id="15" name="Right Arrow 14"/>
+              <a:t>놓은 요소를 고쳐 보고 요소마다 붙은 속성을 확인한다</a:t>
+            </a:r>
+          </a:p>
+        </p:txBody>
+      </p:sp>
+      <p:sp>
+        <p:nvSpPr>
+          <p:cNvPr id="16" name="Rounded Rectangle 15"/>
           <p:cNvSpPr/>
           <p:nvPr/>
         </p:nvSpPr>
         <p:spPr>
           <a:xfrm>
-            <a:off x="4819985" y="3854196"/>
-            <a:ext cx="256031" cy="274320"/>
-          </a:xfrm>
-          <a:prstGeom prst="rightArrow">
-            <a:avLst/>
+            <a:off x="3619423" y="5029771"/>
+            <a:ext cx="822960" cy="292608"/>
+          </a:xfrm>
+          <a:prstGeom prst="roundRect">
+            <a:avLst>
+              <a:gd name="adj" fmla="val 50000"/>
+            </a:avLst>
           </a:prstGeom>
           <a:solidFill>
-            <a:srgbClr val="13294B"/>
+            <a:srgbClr val="D3D9E1"/>
           </a:solidFill>
           <a:ln>
             <a:noFill/>
@@ -38677,22 +38730,92 @@
       </p:sp>
       <p:sp>
         <p:nvSpPr>
-          <p:cNvPr id="16" name="Rounded Rectangle 15"/>
+          <p:cNvPr id="17" name="TextBox 16"/>
+          <p:cNvSpPr txBox="1"/>
+          <p:nvPr/>
+        </p:nvSpPr>
+        <p:spPr>
+          <a:xfrm>
+            <a:off x="3619423" y="5029771"/>
+            <a:ext cx="822960" cy="292608"/>
+          </a:xfrm>
+          <a:prstGeom prst="rect">
+            <a:avLst/>
+          </a:prstGeom>
+          <a:noFill/>
+        </p:spPr>
+        <p:txBody>
+          <a:bodyPr wrap="square" anchor="ctr"/>
+          <a:lstStyle/>
+          <a:p>
+            <a:pPr algn="ctr">
+              <a:lnSpc>
+                <a:spcPct val="110000"/>
+              </a:lnSpc>
+            </a:pPr>
+            <a:r>
+              <a:rPr sz="1200" b="1">
+                <a:solidFill>
+                  <a:srgbClr val="13294B"/>
+                </a:solidFill>
+                <a:latin typeface="맑은 고딕"/>
+                <a:ea typeface="맑은 고딕"/>
+                <a:cs typeface="맑은 고딕"/>
+              </a:rPr>
+              <a:t>속성</a:t>
+            </a:r>
+          </a:p>
+        </p:txBody>
+      </p:sp>
+      <p:sp>
+        <p:nvSpPr>
+          <p:cNvPr id="18" name="Rounded Rectangle 17"/>
           <p:cNvSpPr/>
           <p:nvPr/>
         </p:nvSpPr>
         <p:spPr>
           <a:xfrm>
-            <a:off x="5140025" y="2626423"/>
-            <a:ext cx="1911644" cy="2729864"/>
+            <a:off x="6233007" y="2523172"/>
+            <a:ext cx="2567863" cy="2936366"/>
           </a:xfrm>
           <a:prstGeom prst="roundRect">
             <a:avLst>
-              <a:gd name="adj" fmla="val 5000"/>
+              <a:gd name="adj" fmla="val 4000"/>
             </a:avLst>
           </a:prstGeom>
           <a:solidFill>
-            <a:srgbClr val="F3F6F9"/>
+            <a:srgbClr val="FFFFFF"/>
+          </a:solidFill>
+          <a:ln w="15875">
+            <a:solidFill>
+              <a:srgbClr val="D3D9E1"/>
+            </a:solidFill>
+          </a:ln>
+        </p:spPr>
+        <p:txBody>
+          <a:bodyPr rtlCol="0" anchor="ctr"/>
+          <a:lstStyle/>
+          <a:p>
+            <a:pPr algn="ctr"/>
+          </a:p>
+        </p:txBody>
+      </p:sp>
+      <p:sp>
+        <p:nvSpPr>
+          <p:cNvPr id="19" name="Oval 18"/>
+          <p:cNvSpPr/>
+          <p:nvPr/>
+        </p:nvSpPr>
+        <p:spPr>
+          <a:xfrm>
+            <a:off x="6461607" y="2724340"/>
+            <a:ext cx="731520" cy="731520"/>
+          </a:xfrm>
+          <a:prstGeom prst="ellipse">
+            <a:avLst/>
+          </a:prstGeom>
+          <a:solidFill>
+            <a:srgbClr val="E7F3FD"/>
           </a:solidFill>
           <a:ln>
             <a:noFill/>
@@ -38706,38 +38829,9 @@
           </a:p>
         </p:txBody>
       </p:sp>
-      <p:sp>
-        <p:nvSpPr>
-          <p:cNvPr id="17" name="Oval 16"/>
-          <p:cNvSpPr/>
-          <p:nvPr/>
-        </p:nvSpPr>
-        <p:spPr>
-          <a:xfrm>
-            <a:off x="5730087" y="2809303"/>
-            <a:ext cx="731520" cy="731520"/>
-          </a:xfrm>
-          <a:prstGeom prst="ellipse">
-            <a:avLst/>
-          </a:prstGeom>
-          <a:solidFill>
-            <a:srgbClr val="FFFFFF"/>
-          </a:solidFill>
-          <a:ln>
-            <a:noFill/>
-          </a:ln>
-        </p:spPr>
-        <p:txBody>
-          <a:bodyPr rtlCol="0" anchor="ctr"/>
-          <a:lstStyle/>
-          <a:p>
-            <a:pPr algn="ctr"/>
-          </a:p>
-        </p:txBody>
-      </p:sp>
       <p:pic>
         <p:nvPicPr>
-          <p:cNvPr id="18" name="아이콘:edit" descr="edit_13294B_1.6.png"/>
+          <p:cNvPr id="20" name="아이콘:device-floppy" descr="device-floppy_13294B_1.6.png"/>
           <p:cNvPicPr>
             <a:picLocks noChangeAspect="1"/>
           </p:cNvPicPr>
@@ -38751,7 +38845,7 @@
         </p:blipFill>
         <p:spPr>
           <a:xfrm>
-            <a:off x="5883706" y="2962922"/>
+            <a:off x="6615226" y="2877959"/>
             <a:ext cx="424281" cy="424281"/>
           </a:xfrm>
           <a:prstGeom prst="rect">
@@ -38761,14 +38855,14 @@
       </p:pic>
       <p:sp>
         <p:nvSpPr>
-          <p:cNvPr id="19" name="TextBox 18"/>
-          <p:cNvSpPr txBox="1"/>
-          <p:nvPr/>
-        </p:nvSpPr>
-        <p:spPr>
-          <a:xfrm>
-            <a:off x="5213177" y="3613975"/>
-            <a:ext cx="1765340" cy="1669160"/>
+          <p:cNvPr id="21" name="TextBox 20"/>
+          <p:cNvSpPr txBox="1"/>
+          <p:nvPr/>
+        </p:nvSpPr>
+        <p:spPr>
+          <a:xfrm>
+            <a:off x="6397599" y="3547300"/>
+            <a:ext cx="2238679" cy="1409318"/>
           </a:xfrm>
           <a:prstGeom prst="rect">
             <a:avLst/>
@@ -38779,7 +38873,7 @@
           <a:bodyPr wrap="square" anchor="t"/>
           <a:lstStyle/>
           <a:p>
-            <a:pPr algn="ctr">
+            <a:pPr algn="l">
               <a:lnSpc>
                 <a:spcPct val="110000"/>
               </a:lnSpc>
@@ -38788,7 +38882,7 @@
               </a:spcAft>
             </a:pPr>
             <a:r>
-              <a:rPr sz="1550" b="1">
+              <a:rPr sz="1800" b="1">
                 <a:solidFill>
                   <a:srgbClr val="13294B"/>
                 </a:solidFill>
@@ -38796,11 +38890,11 @@
                 <a:ea typeface="맑은 고딕"/>
                 <a:cs typeface="맑은 고딕"/>
               </a:rPr>
-              <a:t>수정과 속성</a:t>
-            </a:r>
-          </a:p>
-          <a:p>
-            <a:pPr algn="ctr">
+              <a:t>파일로 남긴다</a:t>
+            </a:r>
+          </a:p>
+          <a:p>
+            <a:pPr algn="l">
               <a:lnSpc>
                 <a:spcPct val="110000"/>
               </a:lnSpc>
@@ -38809,7 +38903,7 @@
               </a:spcAft>
             </a:pPr>
             <a:r>
-              <a:rPr sz="1250" b="0">
+              <a:rPr sz="1350" b="0">
                 <a:solidFill>
                   <a:srgbClr val="1F2A3A"/>
                 </a:solidFill>
@@ -38817,48 +38911,29 @@
                 <a:ea typeface="맑은 고딕"/>
                 <a:cs typeface="맑은 고딕"/>
               </a:rPr>
-              <a:t>놓은 요소를 고치고</a:t>
-            </a:r>
-          </a:p>
-          <a:p>
-            <a:pPr algn="ctr">
-              <a:lnSpc>
-                <a:spcPct val="110000"/>
-              </a:lnSpc>
-              <a:spcAft>
-                <a:spcPts val="400"/>
-              </a:spcAft>
-            </a:pPr>
-            <a:r>
-              <a:rPr sz="1250" b="0">
-                <a:solidFill>
-                  <a:srgbClr val="1F2A3A"/>
-                </a:solidFill>
-                <a:latin typeface="맑은 고딕"/>
-                <a:ea typeface="맑은 고딕"/>
-                <a:cs typeface="맑은 고딕"/>
-              </a:rPr>
-              <a:t>속성을 확인한다</a:t>
-            </a:r>
-          </a:p>
-        </p:txBody>
-      </p:sp>
-      <p:sp>
-        <p:nvSpPr>
-          <p:cNvPr id="20" name="Right Arrow 19"/>
+              <a:t>그림을 .bpmn 파일로 저장하고 다시 열어 같은 그림인지 확인한다</a:t>
+            </a:r>
+          </a:p>
+        </p:txBody>
+      </p:sp>
+      <p:sp>
+        <p:nvSpPr>
+          <p:cNvPr id="22" name="Rounded Rectangle 21"/>
           <p:cNvSpPr/>
           <p:nvPr/>
         </p:nvSpPr>
         <p:spPr>
           <a:xfrm>
-            <a:off x="7115677" y="3854196"/>
-            <a:ext cx="256031" cy="274320"/>
-          </a:xfrm>
-          <a:prstGeom prst="rightArrow">
-            <a:avLst/>
+            <a:off x="6461607" y="5029771"/>
+            <a:ext cx="822960" cy="292608"/>
+          </a:xfrm>
+          <a:prstGeom prst="roundRect">
+            <a:avLst>
+              <a:gd name="adj" fmla="val 50000"/>
+            </a:avLst>
           </a:prstGeom>
           <a:solidFill>
-            <a:srgbClr val="13294B"/>
+            <a:srgbClr val="D3D9E1"/>
           </a:solidFill>
           <a:ln>
             <a:noFill/>
@@ -38874,22 +38949,92 @@
       </p:sp>
       <p:sp>
         <p:nvSpPr>
-          <p:cNvPr id="21" name="Rounded Rectangle 20"/>
+          <p:cNvPr id="23" name="TextBox 22"/>
+          <p:cNvSpPr txBox="1"/>
+          <p:nvPr/>
+        </p:nvSpPr>
+        <p:spPr>
+          <a:xfrm>
+            <a:off x="6461607" y="5029771"/>
+            <a:ext cx="822960" cy="292608"/>
+          </a:xfrm>
+          <a:prstGeom prst="rect">
+            <a:avLst/>
+          </a:prstGeom>
+          <a:noFill/>
+        </p:spPr>
+        <p:txBody>
+          <a:bodyPr wrap="square" anchor="ctr"/>
+          <a:lstStyle/>
+          <a:p>
+            <a:pPr algn="ctr">
+              <a:lnSpc>
+                <a:spcPct val="110000"/>
+              </a:lnSpc>
+            </a:pPr>
+            <a:r>
+              <a:rPr sz="1200" b="1">
+                <a:solidFill>
+                  <a:srgbClr val="13294B"/>
+                </a:solidFill>
+                <a:latin typeface="맑은 고딕"/>
+                <a:ea typeface="맑은 고딕"/>
+                <a:cs typeface="맑은 고딕"/>
+              </a:rPr>
+              <a:t>저장</a:t>
+            </a:r>
+          </a:p>
+        </p:txBody>
+      </p:sp>
+      <p:sp>
+        <p:nvSpPr>
+          <p:cNvPr id="24" name="Rounded Rectangle 23"/>
           <p:cNvSpPr/>
           <p:nvPr/>
         </p:nvSpPr>
         <p:spPr>
           <a:xfrm>
-            <a:off x="7435717" y="2626423"/>
-            <a:ext cx="1911644" cy="2729864"/>
+            <a:off x="9075191" y="2523172"/>
+            <a:ext cx="2567863" cy="2936366"/>
           </a:xfrm>
           <a:prstGeom prst="roundRect">
             <a:avLst>
-              <a:gd name="adj" fmla="val 5000"/>
+              <a:gd name="adj" fmla="val 4000"/>
             </a:avLst>
           </a:prstGeom>
           <a:solidFill>
-            <a:srgbClr val="F3F6F9"/>
+            <a:srgbClr val="FFFFFF"/>
+          </a:solidFill>
+          <a:ln w="28575">
+            <a:solidFill>
+              <a:srgbClr val="5CB8F2"/>
+            </a:solidFill>
+          </a:ln>
+        </p:spPr>
+        <p:txBody>
+          <a:bodyPr rtlCol="0" anchor="ctr"/>
+          <a:lstStyle/>
+          <a:p>
+            <a:pPr algn="ctr"/>
+          </a:p>
+        </p:txBody>
+      </p:sp>
+      <p:sp>
+        <p:nvSpPr>
+          <p:cNvPr id="25" name="Oval 24"/>
+          <p:cNvSpPr/>
+          <p:nvPr/>
+        </p:nvSpPr>
+        <p:spPr>
+          <a:xfrm>
+            <a:off x="9303791" y="2724340"/>
+            <a:ext cx="731520" cy="731520"/>
+          </a:xfrm>
+          <a:prstGeom prst="ellipse">
+            <a:avLst/>
+          </a:prstGeom>
+          <a:solidFill>
+            <a:srgbClr val="5CB8F2"/>
           </a:solidFill>
           <a:ln>
             <a:noFill/>
@@ -38903,38 +39048,9 @@
           </a:p>
         </p:txBody>
       </p:sp>
-      <p:sp>
-        <p:nvSpPr>
-          <p:cNvPr id="22" name="Oval 21"/>
-          <p:cNvSpPr/>
-          <p:nvPr/>
-        </p:nvSpPr>
-        <p:spPr>
-          <a:xfrm>
-            <a:off x="8025780" y="2809303"/>
-            <a:ext cx="731520" cy="731520"/>
-          </a:xfrm>
-          <a:prstGeom prst="ellipse">
-            <a:avLst/>
-          </a:prstGeom>
-          <a:solidFill>
-            <a:srgbClr val="FFFFFF"/>
-          </a:solidFill>
-          <a:ln>
-            <a:noFill/>
-          </a:ln>
-        </p:spPr>
-        <p:txBody>
-          <a:bodyPr rtlCol="0" anchor="ctr"/>
-          <a:lstStyle/>
-          <a:p>
-            <a:pPr algn="ctr"/>
-          </a:p>
-        </p:txBody>
-      </p:sp>
       <p:pic>
         <p:nvPicPr>
-          <p:cNvPr id="23" name="아이콘:device-floppy" descr="device-floppy_13294B_1.6.png"/>
+          <p:cNvPr id="26" name="아이콘:file-check" descr="file-check_13294B_1.6.png"/>
           <p:cNvPicPr>
             <a:picLocks noChangeAspect="1"/>
           </p:cNvPicPr>
@@ -38948,7 +39064,7 @@
         </p:blipFill>
         <p:spPr>
           <a:xfrm>
-            <a:off x="8179399" y="2962922"/>
+            <a:off x="9457410" y="2877959"/>
             <a:ext cx="424281" cy="424281"/>
           </a:xfrm>
           <a:prstGeom prst="rect">
@@ -38958,14 +39074,14 @@
       </p:pic>
       <p:sp>
         <p:nvSpPr>
-          <p:cNvPr id="24" name="TextBox 23"/>
-          <p:cNvSpPr txBox="1"/>
-          <p:nvPr/>
-        </p:nvSpPr>
-        <p:spPr>
-          <a:xfrm>
-            <a:off x="7508869" y="3613975"/>
-            <a:ext cx="1765340" cy="1669160"/>
+          <p:cNvPr id="27" name="TextBox 26"/>
+          <p:cNvSpPr txBox="1"/>
+          <p:nvPr/>
+        </p:nvSpPr>
+        <p:spPr>
+          <a:xfrm>
+            <a:off x="9239783" y="3547300"/>
+            <a:ext cx="2238679" cy="1409318"/>
           </a:xfrm>
           <a:prstGeom prst="rect">
             <a:avLst/>
@@ -38976,7 +39092,7 @@
           <a:bodyPr wrap="square" anchor="t"/>
           <a:lstStyle/>
           <a:p>
-            <a:pPr algn="ctr">
+            <a:pPr algn="l">
               <a:lnSpc>
                 <a:spcPct val="110000"/>
               </a:lnSpc>
@@ -38985,7 +39101,7 @@
               </a:spcAft>
             </a:pPr>
             <a:r>
-              <a:rPr sz="1550" b="1">
+              <a:rPr sz="1800" b="1">
                 <a:solidFill>
                   <a:srgbClr val="13294B"/>
                 </a:solidFill>
@@ -38993,11 +39109,11 @@
                 <a:ea typeface="맑은 고딕"/>
                 <a:cs typeface="맑은 고딕"/>
               </a:rPr>
-              <a:t>저장</a:t>
-            </a:r>
-          </a:p>
-          <a:p>
-            <a:pPr algn="ctr">
+              <a:t>만들어지는 것</a:t>
+            </a:r>
+          </a:p>
+          <a:p>
+            <a:pPr algn="l">
               <a:lnSpc>
                 <a:spcPct val="110000"/>
               </a:lnSpc>
@@ -39006,7 +39122,7 @@
               </a:spcAft>
             </a:pPr>
             <a:r>
-              <a:rPr sz="1250" b="0">
+              <a:rPr sz="1350" b="0">
                 <a:solidFill>
                   <a:srgbClr val="1F2A3A"/>
                 </a:solidFill>
@@ -39014,128 +39130,26 @@
                 <a:ea typeface="맑은 고딕"/>
                 <a:cs typeface="맑은 고딕"/>
               </a:rPr>
-              <a:t>그린 그림을</a:t>
-            </a:r>
-          </a:p>
-          <a:p>
-            <a:pPr algn="ctr">
-              <a:lnSpc>
-                <a:spcPct val="110000"/>
-              </a:lnSpc>
-              <a:spcAft>
-                <a:spcPts val="400"/>
-              </a:spcAft>
-            </a:pPr>
-            <a:r>
-              <a:rPr sz="1250" b="0">
-                <a:solidFill>
-                  <a:srgbClr val="1F2A3A"/>
-                </a:solidFill>
-                <a:latin typeface="맑은 고딕"/>
-                <a:ea typeface="맑은 고딕"/>
-                <a:cs typeface="맑은 고딕"/>
-              </a:rPr>
-              <a:t>.bpmn 파일로</a:t>
-            </a:r>
-          </a:p>
-          <a:p>
-            <a:pPr algn="ctr">
-              <a:lnSpc>
-                <a:spcPct val="110000"/>
-              </a:lnSpc>
-              <a:spcAft>
-                <a:spcPts val="400"/>
-              </a:spcAft>
-            </a:pPr>
-            <a:r>
-              <a:rPr sz="1250" b="0">
-                <a:solidFill>
-                  <a:srgbClr val="1F2A3A"/>
-                </a:solidFill>
-                <a:latin typeface="맑은 고딕"/>
-                <a:ea typeface="맑은 고딕"/>
-                <a:cs typeface="맑은 고딕"/>
-              </a:rPr>
-              <a:t>저장한다</a:t>
-            </a:r>
-          </a:p>
-        </p:txBody>
-      </p:sp>
-      <p:sp>
-        <p:nvSpPr>
-          <p:cNvPr id="25" name="Right Arrow 24"/>
+              <a:t>직접 놓고 이은 요소가 담긴 .bpmn 파일 하나</a:t>
+            </a:r>
+          </a:p>
+        </p:txBody>
+      </p:sp>
+      <p:sp>
+        <p:nvSpPr>
+          <p:cNvPr id="28" name="Rounded Rectangle 27"/>
           <p:cNvSpPr/>
           <p:nvPr/>
         </p:nvSpPr>
         <p:spPr>
           <a:xfrm>
-            <a:off x="9411370" y="3854196"/>
-            <a:ext cx="256031" cy="274320"/>
-          </a:xfrm>
-          <a:prstGeom prst="rightArrow">
-            <a:avLst/>
-          </a:prstGeom>
-          <a:solidFill>
-            <a:srgbClr val="13294B"/>
-          </a:solidFill>
-          <a:ln>
-            <a:noFill/>
-          </a:ln>
-        </p:spPr>
-        <p:txBody>
-          <a:bodyPr rtlCol="0" anchor="ctr"/>
-          <a:lstStyle/>
-          <a:p>
-            <a:pPr algn="ctr"/>
-          </a:p>
-        </p:txBody>
-      </p:sp>
-      <p:sp>
-        <p:nvSpPr>
-          <p:cNvPr id="26" name="Rounded Rectangle 25"/>
-          <p:cNvSpPr/>
-          <p:nvPr/>
-        </p:nvSpPr>
-        <p:spPr>
-          <a:xfrm>
-            <a:off x="9731410" y="2626423"/>
-            <a:ext cx="1911644" cy="2729864"/>
+            <a:off x="9303791" y="5029771"/>
+            <a:ext cx="822960" cy="292608"/>
           </a:xfrm>
           <a:prstGeom prst="roundRect">
             <a:avLst>
-              <a:gd name="adj" fmla="val 5000"/>
+              <a:gd name="adj" fmla="val 50000"/>
             </a:avLst>
-          </a:prstGeom>
-          <a:solidFill>
-            <a:srgbClr val="E7F3FD"/>
-          </a:solidFill>
-          <a:ln w="25400">
-            <a:solidFill>
-              <a:srgbClr val="5CB8F2"/>
-            </a:solidFill>
-          </a:ln>
-        </p:spPr>
-        <p:txBody>
-          <a:bodyPr rtlCol="0" anchor="ctr"/>
-          <a:lstStyle/>
-          <a:p>
-            <a:pPr algn="ctr"/>
-          </a:p>
-        </p:txBody>
-      </p:sp>
-      <p:sp>
-        <p:nvSpPr>
-          <p:cNvPr id="27" name="Oval 26"/>
-          <p:cNvSpPr/>
-          <p:nvPr/>
-        </p:nvSpPr>
-        <p:spPr>
-          <a:xfrm>
-            <a:off x="10321472" y="2809303"/>
-            <a:ext cx="731520" cy="731520"/>
-          </a:xfrm>
-          <a:prstGeom prst="ellipse">
-            <a:avLst/>
           </a:prstGeom>
           <a:solidFill>
             <a:srgbClr val="5CB8F2"/>
@@ -39152,30 +39166,6 @@
           </a:p>
         </p:txBody>
       </p:sp>
-      <p:pic>
-        <p:nvPicPr>
-          <p:cNvPr id="28" name="아이콘:folder-open" descr="folder-open_13294B_1.6.png"/>
-          <p:cNvPicPr>
-            <a:picLocks noChangeAspect="1"/>
-          </p:cNvPicPr>
-          <p:nvPr/>
-        </p:nvPicPr>
-        <p:blipFill>
-          <a:blip r:embed="rId7"/>
-          <a:stretch>
-            <a:fillRect/>
-          </a:stretch>
-        </p:blipFill>
-        <p:spPr>
-          <a:xfrm>
-            <a:off x="10475092" y="2962922"/>
-            <a:ext cx="424281" cy="424281"/>
-          </a:xfrm>
-          <a:prstGeom prst="rect">
-            <a:avLst/>
-          </a:prstGeom>
-        </p:spPr>
-      </p:pic>
       <p:sp>
         <p:nvSpPr>
           <p:cNvPr id="29" name="TextBox 28"/>
@@ -39184,28 +39174,25 @@
         </p:nvSpPr>
         <p:spPr>
           <a:xfrm>
-            <a:off x="9804562" y="3613975"/>
-            <a:ext cx="1765340" cy="1669160"/>
-          </a:xfrm>
-          <a:prstGeom prst="rect">
-            <a:avLst/>
-          </a:prstGeom>
-          <a:noFill/>
-        </p:spPr>
-        <p:txBody>
-          <a:bodyPr wrap="square" anchor="t"/>
+            <a:off x="9303791" y="5029771"/>
+            <a:ext cx="822960" cy="292608"/>
+          </a:xfrm>
+          <a:prstGeom prst="rect">
+            <a:avLst/>
+          </a:prstGeom>
+          <a:noFill/>
+        </p:spPr>
+        <p:txBody>
+          <a:bodyPr wrap="square" anchor="ctr"/>
           <a:lstStyle/>
           <a:p>
             <a:pPr algn="ctr">
               <a:lnSpc>
                 <a:spcPct val="110000"/>
               </a:lnSpc>
-              <a:spcAft>
-                <a:spcPts val="400"/>
-              </a:spcAft>
-            </a:pPr>
-            <a:r>
-              <a:rPr sz="1550" b="1">
+            </a:pPr>
+            <a:r>
+              <a:rPr sz="1200" b="1">
                 <a:solidFill>
                   <a:srgbClr val="13294B"/>
                 </a:solidFill>
@@ -39213,70 +39200,7 @@
                 <a:ea typeface="맑은 고딕"/>
                 <a:cs typeface="맑은 고딕"/>
               </a:rPr>
-              <a:t>불러오기</a:t>
-            </a:r>
-          </a:p>
-          <a:p>
-            <a:pPr algn="ctr">
-              <a:lnSpc>
-                <a:spcPct val="110000"/>
-              </a:lnSpc>
-              <a:spcAft>
-                <a:spcPts val="400"/>
-              </a:spcAft>
-            </a:pPr>
-            <a:r>
-              <a:rPr sz="1250" b="0">
-                <a:solidFill>
-                  <a:srgbClr val="1F2A3A"/>
-                </a:solidFill>
-                <a:latin typeface="맑은 고딕"/>
-                <a:ea typeface="맑은 고딕"/>
-                <a:cs typeface="맑은 고딕"/>
-              </a:rPr>
-              <a:t>저장한 파일을</a:t>
-            </a:r>
-          </a:p>
-          <a:p>
-            <a:pPr algn="ctr">
-              <a:lnSpc>
-                <a:spcPct val="110000"/>
-              </a:lnSpc>
-              <a:spcAft>
-                <a:spcPts val="400"/>
-              </a:spcAft>
-            </a:pPr>
-            <a:r>
-              <a:rPr sz="1250" b="0">
-                <a:solidFill>
-                  <a:srgbClr val="1F2A3A"/>
-                </a:solidFill>
-                <a:latin typeface="맑은 고딕"/>
-                <a:ea typeface="맑은 고딕"/>
-                <a:cs typeface="맑은 고딕"/>
-              </a:rPr>
-              <a:t>다시 열어</a:t>
-            </a:r>
-          </a:p>
-          <a:p>
-            <a:pPr algn="ctr">
-              <a:lnSpc>
-                <a:spcPct val="110000"/>
-              </a:lnSpc>
-              <a:spcAft>
-                <a:spcPts val="400"/>
-              </a:spcAft>
-            </a:pPr>
-            <a:r>
-              <a:rPr sz="1250" b="0">
-                <a:solidFill>
-                  <a:srgbClr val="1F2A3A"/>
-                </a:solidFill>
-                <a:latin typeface="맑은 고딕"/>
-                <a:ea typeface="맑은 고딕"/>
-                <a:cs typeface="맑은 고딕"/>
-              </a:rPr>
-              <a:t>그림을 확인한다</a:t>
+              <a:t>결과물</a:t>
             </a:r>
           </a:p>
         </p:txBody>
@@ -39697,7 +39621,7 @@
       </p:sp>
       <p:pic>
         <p:nvPicPr>
-          <p:cNvPr id="6" name="삽화:남은일_추천뒤.svg" descr="illust_2704387792315771279_1791735769.png"/>
+          <p:cNvPr id="6" name="삽화:남은일_추천뒤.svg" descr="illust_3469178349453534812_1791735769.png"/>
           <p:cNvPicPr>
             <a:picLocks noChangeAspect="1"/>
           </p:cNvPicPr>
@@ -54037,7 +53961,7 @@
       </p:sp>
       <p:pic>
         <p:nvPicPr>
-          <p:cNvPr id="6" name="삽화:남은일_종단.svg" descr="illust_6232556825311311444_1791735769.png"/>
+          <p:cNvPr id="6" name="삽화:남은일_종단.svg" descr="illust_5302881200325590264_1791735769.png"/>
           <p:cNvPicPr>
             <a:picLocks noChangeAspect="1"/>
           </p:cNvPicPr>
